--- a/rob.pptx
+++ b/rob.pptx
@@ -7,6 +7,9 @@
   <p:sldIdLst>
     <p:sldId id="256" r:id="rId2"/>
     <p:sldId id="257" r:id="rId3"/>
+    <p:sldId id="258" r:id="rId4"/>
+    <p:sldId id="259" r:id="rId5"/>
+    <p:sldId id="260" r:id="rId6"/>
   </p:sldIdLst>
   <p:sldSz cx="12192000" cy="6858000"/>
   <p:notesSz cx="6858000" cy="9144000"/>
@@ -105,6 +108,11 @@
       </a:defRPr>
     </a:lvl9pPr>
   </p:defaultTextStyle>
+  <p:extLst>
+    <p:ext uri="{EFAFB233-063F-42B5-8137-9DF3F51BA10A}">
+      <p15:sldGuideLst xmlns:p15="http://schemas.microsoft.com/office/powerpoint/2012/main"/>
+    </p:ext>
+  </p:extLst>
 </p:presentation>
 </file>
 
@@ -255,7 +263,7 @@
           <a:p>
             <a:fld id="{3F5B2DEE-4073-4C8E-890A-9D2AA0704961}" type="datetimeFigureOut">
               <a:rPr lang="en-US" smtClean="0"/>
-              <a:t>05-Jul-26</a:t>
+              <a:t>18-Jul-26</a:t>
             </a:fld>
             <a:endParaRPr lang="en-US"/>
           </a:p>
@@ -453,7 +461,7 @@
           <a:p>
             <a:fld id="{3F5B2DEE-4073-4C8E-890A-9D2AA0704961}" type="datetimeFigureOut">
               <a:rPr lang="en-US" smtClean="0"/>
-              <a:t>05-Jul-26</a:t>
+              <a:t>18-Jul-26</a:t>
             </a:fld>
             <a:endParaRPr lang="en-US"/>
           </a:p>
@@ -661,7 +669,7 @@
           <a:p>
             <a:fld id="{3F5B2DEE-4073-4C8E-890A-9D2AA0704961}" type="datetimeFigureOut">
               <a:rPr lang="en-US" smtClean="0"/>
-              <a:t>05-Jul-26</a:t>
+              <a:t>18-Jul-26</a:t>
             </a:fld>
             <a:endParaRPr lang="en-US"/>
           </a:p>
@@ -859,7 +867,7 @@
           <a:p>
             <a:fld id="{3F5B2DEE-4073-4C8E-890A-9D2AA0704961}" type="datetimeFigureOut">
               <a:rPr lang="en-US" smtClean="0"/>
-              <a:t>05-Jul-26</a:t>
+              <a:t>18-Jul-26</a:t>
             </a:fld>
             <a:endParaRPr lang="en-US"/>
           </a:p>
@@ -1134,7 +1142,7 @@
           <a:p>
             <a:fld id="{3F5B2DEE-4073-4C8E-890A-9D2AA0704961}" type="datetimeFigureOut">
               <a:rPr lang="en-US" smtClean="0"/>
-              <a:t>05-Jul-26</a:t>
+              <a:t>18-Jul-26</a:t>
             </a:fld>
             <a:endParaRPr lang="en-US"/>
           </a:p>
@@ -1399,7 +1407,7 @@
           <a:p>
             <a:fld id="{3F5B2DEE-4073-4C8E-890A-9D2AA0704961}" type="datetimeFigureOut">
               <a:rPr lang="en-US" smtClean="0"/>
-              <a:t>05-Jul-26</a:t>
+              <a:t>18-Jul-26</a:t>
             </a:fld>
             <a:endParaRPr lang="en-US"/>
           </a:p>
@@ -1811,7 +1819,7 @@
           <a:p>
             <a:fld id="{3F5B2DEE-4073-4C8E-890A-9D2AA0704961}" type="datetimeFigureOut">
               <a:rPr lang="en-US" smtClean="0"/>
-              <a:t>05-Jul-26</a:t>
+              <a:t>18-Jul-26</a:t>
             </a:fld>
             <a:endParaRPr lang="en-US"/>
           </a:p>
@@ -1952,7 +1960,7 @@
           <a:p>
             <a:fld id="{3F5B2DEE-4073-4C8E-890A-9D2AA0704961}" type="datetimeFigureOut">
               <a:rPr lang="en-US" smtClean="0"/>
-              <a:t>05-Jul-26</a:t>
+              <a:t>18-Jul-26</a:t>
             </a:fld>
             <a:endParaRPr lang="en-US"/>
           </a:p>
@@ -2065,7 +2073,7 @@
           <a:p>
             <a:fld id="{3F5B2DEE-4073-4C8E-890A-9D2AA0704961}" type="datetimeFigureOut">
               <a:rPr lang="en-US" smtClean="0"/>
-              <a:t>05-Jul-26</a:t>
+              <a:t>18-Jul-26</a:t>
             </a:fld>
             <a:endParaRPr lang="en-US"/>
           </a:p>
@@ -2376,7 +2384,7 @@
           <a:p>
             <a:fld id="{3F5B2DEE-4073-4C8E-890A-9D2AA0704961}" type="datetimeFigureOut">
               <a:rPr lang="en-US" smtClean="0"/>
-              <a:t>05-Jul-26</a:t>
+              <a:t>18-Jul-26</a:t>
             </a:fld>
             <a:endParaRPr lang="en-US"/>
           </a:p>
@@ -2664,7 +2672,7 @@
           <a:p>
             <a:fld id="{3F5B2DEE-4073-4C8E-890A-9D2AA0704961}" type="datetimeFigureOut">
               <a:rPr lang="en-US" smtClean="0"/>
-              <a:t>05-Jul-26</a:t>
+              <a:t>18-Jul-26</a:t>
             </a:fld>
             <a:endParaRPr lang="en-US"/>
           </a:p>
@@ -2905,7 +2913,7 @@
           <a:p>
             <a:fld id="{3F5B2DEE-4073-4C8E-890A-9D2AA0704961}" type="datetimeFigureOut">
               <a:rPr lang="en-US" smtClean="0"/>
-              <a:t>05-Jul-26</a:t>
+              <a:t>18-Jul-26</a:t>
             </a:fld>
             <a:endParaRPr lang="en-US"/>
           </a:p>
@@ -4632,6 +4640,3964 @@
 </p:sld>
 </file>
 
+<file path=ppt/slides/slide3.xml><?xml version="1.0" encoding="utf-8"?>
+<p:sld xmlns:a="http://schemas.openxmlformats.org/drawingml/2006/main" xmlns:r="http://schemas.openxmlformats.org/officeDocument/2006/relationships" xmlns:p="http://schemas.openxmlformats.org/presentationml/2006/main">
+  <p:cSld>
+    <p:spTree>
+      <p:nvGrpSpPr>
+        <p:cNvPr id="1" name=""/>
+        <p:cNvGrpSpPr/>
+        <p:nvPr/>
+      </p:nvGrpSpPr>
+      <p:grpSpPr>
+        <a:xfrm>
+          <a:off x="0" y="0"/>
+          <a:ext cx="0" cy="0"/>
+          <a:chOff x="0" y="0"/>
+          <a:chExt cx="0" cy="0"/>
+        </a:xfrm>
+      </p:grpSpPr>
+      <p:pic>
+        <p:nvPicPr>
+          <p:cNvPr id="5" name="Picture 4">
+            <a:extLst>
+              <a:ext uri="{FF2B5EF4-FFF2-40B4-BE49-F238E27FC236}">
+                <a16:creationId xmlns:a16="http://schemas.microsoft.com/office/drawing/2014/main" id="{00B94163-23F9-405C-BC23-9758F4439CA6}"/>
+              </a:ext>
+            </a:extLst>
+          </p:cNvPr>
+          <p:cNvPicPr>
+            <a:picLocks noChangeAspect="1"/>
+          </p:cNvPicPr>
+          <p:nvPr/>
+        </p:nvPicPr>
+        <p:blipFill>
+          <a:blip r:embed="rId2">
+            <a:extLst>
+              <a:ext uri="{28A0092B-C50C-407E-A947-70E740481C1C}">
+                <a14:useLocalDpi xmlns:a14="http://schemas.microsoft.com/office/drawing/2010/main" val="0"/>
+              </a:ext>
+            </a:extLst>
+          </a:blip>
+          <a:stretch>
+            <a:fillRect/>
+          </a:stretch>
+        </p:blipFill>
+        <p:spPr>
+          <a:xfrm>
+            <a:off x="254676" y="3853980"/>
+            <a:ext cx="2851620" cy="2851620"/>
+          </a:xfrm>
+          <a:prstGeom prst="rect">
+            <a:avLst/>
+          </a:prstGeom>
+        </p:spPr>
+      </p:pic>
+      <p:pic>
+        <p:nvPicPr>
+          <p:cNvPr id="7" name="Picture 6">
+            <a:extLst>
+              <a:ext uri="{FF2B5EF4-FFF2-40B4-BE49-F238E27FC236}">
+                <a16:creationId xmlns:a16="http://schemas.microsoft.com/office/drawing/2014/main" id="{8C13782A-45D0-21B8-1ED3-ED593C8E06DB}"/>
+              </a:ext>
+            </a:extLst>
+          </p:cNvPr>
+          <p:cNvPicPr>
+            <a:picLocks noChangeAspect="1"/>
+          </p:cNvPicPr>
+          <p:nvPr/>
+        </p:nvPicPr>
+        <p:blipFill>
+          <a:blip r:embed="rId3">
+            <a:extLst>
+              <a:ext uri="{28A0092B-C50C-407E-A947-70E740481C1C}">
+                <a14:useLocalDpi xmlns:a14="http://schemas.microsoft.com/office/drawing/2010/main" val="0"/>
+              </a:ext>
+            </a:extLst>
+          </a:blip>
+          <a:stretch>
+            <a:fillRect/>
+          </a:stretch>
+        </p:blipFill>
+        <p:spPr>
+          <a:xfrm>
+            <a:off x="4083256" y="153054"/>
+            <a:ext cx="2832465" cy="2832465"/>
+          </a:xfrm>
+          <a:prstGeom prst="rect">
+            <a:avLst/>
+          </a:prstGeom>
+        </p:spPr>
+      </p:pic>
+      <p:pic>
+        <p:nvPicPr>
+          <p:cNvPr id="9" name="Picture 8">
+            <a:extLst>
+              <a:ext uri="{FF2B5EF4-FFF2-40B4-BE49-F238E27FC236}">
+                <a16:creationId xmlns:a16="http://schemas.microsoft.com/office/drawing/2014/main" id="{31479D7B-1E8C-66A8-4ACF-323A247C3E8B}"/>
+              </a:ext>
+            </a:extLst>
+          </p:cNvPr>
+          <p:cNvPicPr>
+            <a:picLocks noChangeAspect="1"/>
+          </p:cNvPicPr>
+          <p:nvPr/>
+        </p:nvPicPr>
+        <p:blipFill>
+          <a:blip r:embed="rId4">
+            <a:extLst>
+              <a:ext uri="{28A0092B-C50C-407E-A947-70E740481C1C}">
+                <a14:useLocalDpi xmlns:a14="http://schemas.microsoft.com/office/drawing/2010/main" val="0"/>
+              </a:ext>
+            </a:extLst>
+          </a:blip>
+          <a:stretch>
+            <a:fillRect/>
+          </a:stretch>
+        </p:blipFill>
+        <p:spPr>
+          <a:xfrm>
+            <a:off x="7969933" y="158283"/>
+            <a:ext cx="2851620" cy="2851620"/>
+          </a:xfrm>
+          <a:prstGeom prst="rect">
+            <a:avLst/>
+          </a:prstGeom>
+        </p:spPr>
+      </p:pic>
+      <p:pic>
+        <p:nvPicPr>
+          <p:cNvPr id="11" name="Picture 10">
+            <a:extLst>
+              <a:ext uri="{FF2B5EF4-FFF2-40B4-BE49-F238E27FC236}">
+                <a16:creationId xmlns:a16="http://schemas.microsoft.com/office/drawing/2014/main" id="{33FEED98-D14C-3209-BE09-278D3EF18B11}"/>
+              </a:ext>
+            </a:extLst>
+          </p:cNvPr>
+          <p:cNvPicPr>
+            <a:picLocks noChangeAspect="1"/>
+          </p:cNvPicPr>
+          <p:nvPr/>
+        </p:nvPicPr>
+        <p:blipFill>
+          <a:blip r:embed="rId5">
+            <a:extLst>
+              <a:ext uri="{28A0092B-C50C-407E-A947-70E740481C1C}">
+                <a14:useLocalDpi xmlns:a14="http://schemas.microsoft.com/office/drawing/2010/main" val="0"/>
+              </a:ext>
+            </a:extLst>
+          </a:blip>
+          <a:stretch>
+            <a:fillRect/>
+          </a:stretch>
+        </p:blipFill>
+        <p:spPr>
+          <a:xfrm>
+            <a:off x="276225" y="152400"/>
+            <a:ext cx="2830071" cy="2830071"/>
+          </a:xfrm>
+          <a:prstGeom prst="rect">
+            <a:avLst/>
+          </a:prstGeom>
+        </p:spPr>
+      </p:pic>
+      <p:sp>
+        <p:nvSpPr>
+          <p:cNvPr id="13" name="TextBox 12">
+            <a:extLst>
+              <a:ext uri="{FF2B5EF4-FFF2-40B4-BE49-F238E27FC236}">
+                <a16:creationId xmlns:a16="http://schemas.microsoft.com/office/drawing/2014/main" id="{E60A845F-107C-7AD0-06BC-4259328E23C9}"/>
+              </a:ext>
+            </a:extLst>
+          </p:cNvPr>
+          <p:cNvSpPr txBox="1"/>
+          <p:nvPr/>
+        </p:nvSpPr>
+        <p:spPr>
+          <a:xfrm>
+            <a:off x="1330069" y="3004020"/>
+            <a:ext cx="700833" cy="369332"/>
+          </a:xfrm>
+          <a:prstGeom prst="rect">
+            <a:avLst/>
+          </a:prstGeom>
+          <a:noFill/>
+        </p:spPr>
+        <p:txBody>
+          <a:bodyPr wrap="none" rtlCol="0">
+            <a:spAutoFit/>
+          </a:bodyPr>
+          <a:lstStyle/>
+          <a:p>
+            <a:r>
+              <a:rPr lang="en-US" dirty="0">
+                <a:latin typeface="Segoe UI" panose="020B0502040204020203" pitchFamily="34" charset="0"/>
+                <a:cs typeface="Segoe UI" panose="020B0502040204020203" pitchFamily="34" charset="0"/>
+              </a:rPr>
+              <a:t>Zone</a:t>
+            </a:r>
+          </a:p>
+        </p:txBody>
+      </p:sp>
+      <p:sp>
+        <p:nvSpPr>
+          <p:cNvPr id="15" name="TextBox 14">
+            <a:extLst>
+              <a:ext uri="{FF2B5EF4-FFF2-40B4-BE49-F238E27FC236}">
+                <a16:creationId xmlns:a16="http://schemas.microsoft.com/office/drawing/2014/main" id="{47DF35C6-0F04-0695-43FE-A237DC2FDC52}"/>
+              </a:ext>
+            </a:extLst>
+          </p:cNvPr>
+          <p:cNvSpPr txBox="1"/>
+          <p:nvPr/>
+        </p:nvSpPr>
+        <p:spPr>
+          <a:xfrm>
+            <a:off x="5149071" y="3059668"/>
+            <a:ext cx="1426288" cy="369332"/>
+          </a:xfrm>
+          <a:prstGeom prst="rect">
+            <a:avLst/>
+          </a:prstGeom>
+          <a:noFill/>
+        </p:spPr>
+        <p:txBody>
+          <a:bodyPr wrap="none" rtlCol="0">
+            <a:spAutoFit/>
+          </a:bodyPr>
+          <a:lstStyle/>
+          <a:p>
+            <a:r>
+              <a:rPr lang="en-US" dirty="0">
+                <a:latin typeface="Segoe UI" panose="020B0502040204020203" pitchFamily="34" charset="0"/>
+                <a:cs typeface="Segoe UI" panose="020B0502040204020203" pitchFamily="34" charset="0"/>
+              </a:rPr>
+              <a:t>Value Raster</a:t>
+            </a:r>
+          </a:p>
+        </p:txBody>
+      </p:sp>
+      <p:sp>
+        <p:nvSpPr>
+          <p:cNvPr id="17" name="TextBox 16">
+            <a:extLst>
+              <a:ext uri="{FF2B5EF4-FFF2-40B4-BE49-F238E27FC236}">
+                <a16:creationId xmlns:a16="http://schemas.microsoft.com/office/drawing/2014/main" id="{A347E882-1B7B-2F6B-1120-7729038321D0}"/>
+              </a:ext>
+            </a:extLst>
+          </p:cNvPr>
+          <p:cNvSpPr txBox="1"/>
+          <p:nvPr/>
+        </p:nvSpPr>
+        <p:spPr>
+          <a:xfrm>
+            <a:off x="8682599" y="3059668"/>
+            <a:ext cx="1604735" cy="369332"/>
+          </a:xfrm>
+          <a:prstGeom prst="rect">
+            <a:avLst/>
+          </a:prstGeom>
+          <a:noFill/>
+        </p:spPr>
+        <p:txBody>
+          <a:bodyPr wrap="none" rtlCol="0">
+            <a:spAutoFit/>
+          </a:bodyPr>
+          <a:lstStyle/>
+          <a:p>
+            <a:r>
+              <a:rPr lang="en-US" dirty="0">
+                <a:latin typeface="Segoe UI" panose="020B0502040204020203" pitchFamily="34" charset="0"/>
+                <a:cs typeface="Segoe UI" panose="020B0502040204020203" pitchFamily="34" charset="0"/>
+              </a:rPr>
+              <a:t>Output Raster</a:t>
+            </a:r>
+          </a:p>
+        </p:txBody>
+      </p:sp>
+      <p:sp>
+        <p:nvSpPr>
+          <p:cNvPr id="19" name="TextBox 18">
+            <a:extLst>
+              <a:ext uri="{FF2B5EF4-FFF2-40B4-BE49-F238E27FC236}">
+                <a16:creationId xmlns:a16="http://schemas.microsoft.com/office/drawing/2014/main" id="{7C3BC606-3C0C-5D36-416C-C2E839F6A890}"/>
+              </a:ext>
+            </a:extLst>
+          </p:cNvPr>
+          <p:cNvSpPr txBox="1"/>
+          <p:nvPr/>
+        </p:nvSpPr>
+        <p:spPr>
+          <a:xfrm>
+            <a:off x="3272646" y="5095124"/>
+            <a:ext cx="1426288" cy="369332"/>
+          </a:xfrm>
+          <a:prstGeom prst="rect">
+            <a:avLst/>
+          </a:prstGeom>
+          <a:noFill/>
+        </p:spPr>
+        <p:txBody>
+          <a:bodyPr wrap="none" rtlCol="0">
+            <a:spAutoFit/>
+          </a:bodyPr>
+          <a:lstStyle/>
+          <a:p>
+            <a:r>
+              <a:rPr lang="en-US" dirty="0">
+                <a:latin typeface="Segoe UI" panose="020B0502040204020203" pitchFamily="34" charset="0"/>
+                <a:cs typeface="Segoe UI" panose="020B0502040204020203" pitchFamily="34" charset="0"/>
+              </a:rPr>
+              <a:t>Value Raster</a:t>
+            </a:r>
+          </a:p>
+        </p:txBody>
+      </p:sp>
+    </p:spTree>
+    <p:extLst>
+      <p:ext uri="{BB962C8B-B14F-4D97-AF65-F5344CB8AC3E}">
+        <p14:creationId xmlns:p14="http://schemas.microsoft.com/office/powerpoint/2010/main" val="209014847"/>
+      </p:ext>
+    </p:extLst>
+  </p:cSld>
+  <p:clrMapOvr>
+    <a:masterClrMapping/>
+  </p:clrMapOvr>
+</p:sld>
+</file>
+
+<file path=ppt/slides/slide4.xml><?xml version="1.0" encoding="utf-8"?>
+<p:sld xmlns:a="http://schemas.openxmlformats.org/drawingml/2006/main" xmlns:r="http://schemas.openxmlformats.org/officeDocument/2006/relationships" xmlns:p="http://schemas.openxmlformats.org/presentationml/2006/main">
+  <p:cSld>
+    <p:spTree>
+      <p:nvGrpSpPr>
+        <p:cNvPr id="1" name=""/>
+        <p:cNvGrpSpPr/>
+        <p:nvPr/>
+      </p:nvGrpSpPr>
+      <p:grpSpPr>
+        <a:xfrm>
+          <a:off x="0" y="0"/>
+          <a:ext cx="0" cy="0"/>
+          <a:chOff x="0" y="0"/>
+          <a:chExt cx="0" cy="0"/>
+        </a:xfrm>
+      </p:grpSpPr>
+      <p:sp>
+        <p:nvSpPr>
+          <p:cNvPr id="30" name="TextBox 29">
+            <a:extLst>
+              <a:ext uri="{FF2B5EF4-FFF2-40B4-BE49-F238E27FC236}">
+                <a16:creationId xmlns:a16="http://schemas.microsoft.com/office/drawing/2014/main" id="{DB4B4F24-1E20-1247-7BD1-A3B9F9C31EFB}"/>
+              </a:ext>
+            </a:extLst>
+          </p:cNvPr>
+          <p:cNvSpPr txBox="1"/>
+          <p:nvPr/>
+        </p:nvSpPr>
+        <p:spPr>
+          <a:xfrm>
+            <a:off x="1319122" y="3025557"/>
+            <a:ext cx="973343" cy="261610"/>
+          </a:xfrm>
+          <a:prstGeom prst="rect">
+            <a:avLst/>
+          </a:prstGeom>
+          <a:noFill/>
+        </p:spPr>
+        <p:txBody>
+          <a:bodyPr wrap="none" rtlCol="0">
+            <a:spAutoFit/>
+          </a:bodyPr>
+          <a:lstStyle/>
+          <a:p>
+            <a:r>
+              <a:rPr lang="en-US" sz="1100" b="1" dirty="0">
+                <a:latin typeface="Segoe UI" panose="020B0502040204020203" pitchFamily="34" charset="0"/>
+                <a:cs typeface="Segoe UI" panose="020B0502040204020203" pitchFamily="34" charset="0"/>
+              </a:rPr>
+              <a:t>Zone Raster</a:t>
+            </a:r>
+          </a:p>
+        </p:txBody>
+      </p:sp>
+      <p:sp>
+        <p:nvSpPr>
+          <p:cNvPr id="32" name="TextBox 31">
+            <a:extLst>
+              <a:ext uri="{FF2B5EF4-FFF2-40B4-BE49-F238E27FC236}">
+                <a16:creationId xmlns:a16="http://schemas.microsoft.com/office/drawing/2014/main" id="{2C85D96D-C8BB-B097-99B5-F54B8322AB49}"/>
+              </a:ext>
+            </a:extLst>
+          </p:cNvPr>
+          <p:cNvSpPr txBox="1"/>
+          <p:nvPr/>
+        </p:nvSpPr>
+        <p:spPr>
+          <a:xfrm>
+            <a:off x="4697453" y="3025557"/>
+            <a:ext cx="1011815" cy="261610"/>
+          </a:xfrm>
+          <a:prstGeom prst="rect">
+            <a:avLst/>
+          </a:prstGeom>
+          <a:noFill/>
+        </p:spPr>
+        <p:txBody>
+          <a:bodyPr wrap="none" rtlCol="0">
+            <a:spAutoFit/>
+          </a:bodyPr>
+          <a:lstStyle/>
+          <a:p>
+            <a:r>
+              <a:rPr lang="en-US" sz="1100" b="1" dirty="0">
+                <a:latin typeface="Segoe UI" panose="020B0502040204020203" pitchFamily="34" charset="0"/>
+                <a:cs typeface="Segoe UI" panose="020B0502040204020203" pitchFamily="34" charset="0"/>
+              </a:rPr>
+              <a:t>Value Raster</a:t>
+            </a:r>
+          </a:p>
+        </p:txBody>
+      </p:sp>
+      <p:sp>
+        <p:nvSpPr>
+          <p:cNvPr id="34" name="TextBox 33">
+            <a:extLst>
+              <a:ext uri="{FF2B5EF4-FFF2-40B4-BE49-F238E27FC236}">
+                <a16:creationId xmlns:a16="http://schemas.microsoft.com/office/drawing/2014/main" id="{3D475998-2FD7-602D-FA2D-AF7437604F3B}"/>
+              </a:ext>
+            </a:extLst>
+          </p:cNvPr>
+          <p:cNvSpPr txBox="1"/>
+          <p:nvPr/>
+        </p:nvSpPr>
+        <p:spPr>
+          <a:xfrm>
+            <a:off x="4646157" y="6242923"/>
+            <a:ext cx="1114408" cy="261610"/>
+          </a:xfrm>
+          <a:prstGeom prst="rect">
+            <a:avLst/>
+          </a:prstGeom>
+          <a:noFill/>
+        </p:spPr>
+        <p:txBody>
+          <a:bodyPr wrap="none" rtlCol="0">
+            <a:spAutoFit/>
+          </a:bodyPr>
+          <a:lstStyle/>
+          <a:p>
+            <a:r>
+              <a:rPr lang="en-US" sz="1100" b="1" dirty="0">
+                <a:latin typeface="Segoe UI" panose="020B0502040204020203" pitchFamily="34" charset="0"/>
+                <a:cs typeface="Segoe UI" panose="020B0502040204020203" pitchFamily="34" charset="0"/>
+              </a:rPr>
+              <a:t>Output Raster</a:t>
+            </a:r>
+          </a:p>
+        </p:txBody>
+      </p:sp>
+      <p:sp>
+        <p:nvSpPr>
+          <p:cNvPr id="36" name="TextBox 35">
+            <a:extLst>
+              <a:ext uri="{FF2B5EF4-FFF2-40B4-BE49-F238E27FC236}">
+                <a16:creationId xmlns:a16="http://schemas.microsoft.com/office/drawing/2014/main" id="{C57E3027-D547-C75A-59C7-B3DABC1AE99F}"/>
+              </a:ext>
+            </a:extLst>
+          </p:cNvPr>
+          <p:cNvSpPr txBox="1"/>
+          <p:nvPr/>
+        </p:nvSpPr>
+        <p:spPr>
+          <a:xfrm>
+            <a:off x="750858" y="6242923"/>
+            <a:ext cx="2109873" cy="261610"/>
+          </a:xfrm>
+          <a:prstGeom prst="rect">
+            <a:avLst/>
+          </a:prstGeom>
+          <a:noFill/>
+        </p:spPr>
+        <p:txBody>
+          <a:bodyPr wrap="none" rtlCol="0">
+            <a:spAutoFit/>
+          </a:bodyPr>
+          <a:lstStyle/>
+          <a:p>
+            <a:r>
+              <a:rPr lang="en-US" sz="1100" b="1" dirty="0">
+                <a:latin typeface="Segoe UI" panose="020B0502040204020203" pitchFamily="34" charset="0"/>
+                <a:cs typeface="Segoe UI" panose="020B0502040204020203" pitchFamily="34" charset="0"/>
+              </a:rPr>
+              <a:t>Value Raster with Input Zone</a:t>
+            </a:r>
+          </a:p>
+        </p:txBody>
+      </p:sp>
+      <p:pic>
+        <p:nvPicPr>
+          <p:cNvPr id="40" name="Picture 39">
+            <a:extLst>
+              <a:ext uri="{FF2B5EF4-FFF2-40B4-BE49-F238E27FC236}">
+                <a16:creationId xmlns:a16="http://schemas.microsoft.com/office/drawing/2014/main" id="{428F965E-98AA-07A0-CD5D-33717B349EAD}"/>
+              </a:ext>
+            </a:extLst>
+          </p:cNvPr>
+          <p:cNvPicPr>
+            <a:picLocks noChangeAspect="1"/>
+          </p:cNvPicPr>
+          <p:nvPr/>
+        </p:nvPicPr>
+        <p:blipFill>
+          <a:blip r:embed="rId2"/>
+          <a:stretch>
+            <a:fillRect/>
+          </a:stretch>
+        </p:blipFill>
+        <p:spPr>
+          <a:xfrm>
+            <a:off x="3765087" y="230743"/>
+            <a:ext cx="2876550" cy="2775764"/>
+          </a:xfrm>
+          <a:prstGeom prst="rect">
+            <a:avLst/>
+          </a:prstGeom>
+        </p:spPr>
+      </p:pic>
+      <p:pic>
+        <p:nvPicPr>
+          <p:cNvPr id="42" name="Picture 41">
+            <a:extLst>
+              <a:ext uri="{FF2B5EF4-FFF2-40B4-BE49-F238E27FC236}">
+                <a16:creationId xmlns:a16="http://schemas.microsoft.com/office/drawing/2014/main" id="{F018D9BD-F289-0821-4B80-32186CDA3BF3}"/>
+              </a:ext>
+            </a:extLst>
+          </p:cNvPr>
+          <p:cNvPicPr>
+            <a:picLocks noChangeAspect="1"/>
+          </p:cNvPicPr>
+          <p:nvPr/>
+        </p:nvPicPr>
+        <p:blipFill>
+          <a:blip r:embed="rId3"/>
+          <a:stretch>
+            <a:fillRect/>
+          </a:stretch>
+        </p:blipFill>
+        <p:spPr>
+          <a:xfrm>
+            <a:off x="367521" y="3441442"/>
+            <a:ext cx="2876550" cy="2781300"/>
+          </a:xfrm>
+          <a:prstGeom prst="rect">
+            <a:avLst/>
+          </a:prstGeom>
+        </p:spPr>
+      </p:pic>
+      <p:pic>
+        <p:nvPicPr>
+          <p:cNvPr id="44" name="Picture 43">
+            <a:extLst>
+              <a:ext uri="{FF2B5EF4-FFF2-40B4-BE49-F238E27FC236}">
+                <a16:creationId xmlns:a16="http://schemas.microsoft.com/office/drawing/2014/main" id="{93EB1482-6514-4A6C-73AC-0F0660BE4FA4}"/>
+              </a:ext>
+            </a:extLst>
+          </p:cNvPr>
+          <p:cNvPicPr>
+            <a:picLocks noChangeAspect="1"/>
+          </p:cNvPicPr>
+          <p:nvPr/>
+        </p:nvPicPr>
+        <p:blipFill>
+          <a:blip r:embed="rId4"/>
+          <a:stretch>
+            <a:fillRect/>
+          </a:stretch>
+        </p:blipFill>
+        <p:spPr>
+          <a:xfrm>
+            <a:off x="3765087" y="3441442"/>
+            <a:ext cx="2876550" cy="2781300"/>
+          </a:xfrm>
+          <a:prstGeom prst="rect">
+            <a:avLst/>
+          </a:prstGeom>
+        </p:spPr>
+      </p:pic>
+      <p:sp>
+        <p:nvSpPr>
+          <p:cNvPr id="45" name="TextBox 44">
+            <a:extLst>
+              <a:ext uri="{FF2B5EF4-FFF2-40B4-BE49-F238E27FC236}">
+                <a16:creationId xmlns:a16="http://schemas.microsoft.com/office/drawing/2014/main" id="{169AC960-70F3-C7D1-1B2C-20FE6225E61B}"/>
+              </a:ext>
+            </a:extLst>
+          </p:cNvPr>
+          <p:cNvSpPr txBox="1"/>
+          <p:nvPr/>
+        </p:nvSpPr>
+        <p:spPr>
+          <a:xfrm>
+            <a:off x="6734175" y="230743"/>
+            <a:ext cx="1649747" cy="1200329"/>
+          </a:xfrm>
+          <a:prstGeom prst="rect">
+            <a:avLst/>
+          </a:prstGeom>
+          <a:noFill/>
+        </p:spPr>
+        <p:txBody>
+          <a:bodyPr wrap="none" rtlCol="0">
+            <a:spAutoFit/>
+          </a:bodyPr>
+          <a:lstStyle/>
+          <a:p>
+            <a:r>
+              <a:rPr lang="en-US" sz="1200" b="1" dirty="0">
+                <a:latin typeface="Segoe UI" panose="020B0502040204020203" pitchFamily="34" charset="0"/>
+                <a:cs typeface="Segoe UI" panose="020B0502040204020203" pitchFamily="34" charset="0"/>
+              </a:rPr>
+              <a:t>Remark Value</a:t>
+            </a:r>
+          </a:p>
+          <a:p>
+            <a:r>
+              <a:rPr lang="en-US" sz="1200" dirty="0">
+                <a:latin typeface="Segoe UI" panose="020B0502040204020203" pitchFamily="34" charset="0"/>
+                <a:cs typeface="Segoe UI" panose="020B0502040204020203" pitchFamily="34" charset="0"/>
+              </a:rPr>
+              <a:t>1- Natural Vegetation</a:t>
+            </a:r>
+          </a:p>
+          <a:p>
+            <a:r>
+              <a:rPr lang="en-US" sz="1200" dirty="0">
+                <a:latin typeface="Segoe UI" panose="020B0502040204020203" pitchFamily="34" charset="0"/>
+                <a:cs typeface="Segoe UI" panose="020B0502040204020203" pitchFamily="34" charset="0"/>
+              </a:rPr>
+              <a:t>2 - Water</a:t>
+            </a:r>
+          </a:p>
+          <a:p>
+            <a:r>
+              <a:rPr lang="en-US" sz="1200" dirty="0">
+                <a:latin typeface="Segoe UI" panose="020B0502040204020203" pitchFamily="34" charset="0"/>
+                <a:cs typeface="Segoe UI" panose="020B0502040204020203" pitchFamily="34" charset="0"/>
+              </a:rPr>
+              <a:t>3 - Settlement</a:t>
+            </a:r>
+          </a:p>
+          <a:p>
+            <a:r>
+              <a:rPr lang="en-US" sz="1200" dirty="0">
+                <a:latin typeface="Segoe UI" panose="020B0502040204020203" pitchFamily="34" charset="0"/>
+                <a:cs typeface="Segoe UI" panose="020B0502040204020203" pitchFamily="34" charset="0"/>
+              </a:rPr>
+              <a:t>4 - Bare land</a:t>
+            </a:r>
+          </a:p>
+          <a:p>
+            <a:r>
+              <a:rPr lang="en-US" sz="1200" dirty="0">
+                <a:latin typeface="Segoe UI" panose="020B0502040204020203" pitchFamily="34" charset="0"/>
+                <a:cs typeface="Segoe UI" panose="020B0502040204020203" pitchFamily="34" charset="0"/>
+              </a:rPr>
+              <a:t>5 - Plantation</a:t>
+            </a:r>
+          </a:p>
+        </p:txBody>
+      </p:sp>
+      <p:pic>
+        <p:nvPicPr>
+          <p:cNvPr id="47" name="Picture 46">
+            <a:extLst>
+              <a:ext uri="{FF2B5EF4-FFF2-40B4-BE49-F238E27FC236}">
+                <a16:creationId xmlns:a16="http://schemas.microsoft.com/office/drawing/2014/main" id="{7E313E46-FAAE-D4D9-D789-C1DA9B01B1C7}"/>
+              </a:ext>
+            </a:extLst>
+          </p:cNvPr>
+          <p:cNvPicPr>
+            <a:picLocks noChangeAspect="1"/>
+          </p:cNvPicPr>
+          <p:nvPr/>
+        </p:nvPicPr>
+        <p:blipFill>
+          <a:blip r:embed="rId5"/>
+          <a:stretch>
+            <a:fillRect/>
+          </a:stretch>
+        </p:blipFill>
+        <p:spPr>
+          <a:xfrm>
+            <a:off x="367521" y="230743"/>
+            <a:ext cx="2876550" cy="2781300"/>
+          </a:xfrm>
+          <a:prstGeom prst="rect">
+            <a:avLst/>
+          </a:prstGeom>
+        </p:spPr>
+      </p:pic>
+      <p:graphicFrame>
+        <p:nvGraphicFramePr>
+          <p:cNvPr id="52" name="Table 51">
+            <a:extLst>
+              <a:ext uri="{FF2B5EF4-FFF2-40B4-BE49-F238E27FC236}">
+                <a16:creationId xmlns:a16="http://schemas.microsoft.com/office/drawing/2014/main" id="{D485969E-D3C2-A9DF-0D35-536BE851DFA0}"/>
+              </a:ext>
+            </a:extLst>
+          </p:cNvPr>
+          <p:cNvGraphicFramePr>
+            <a:graphicFrameLocks noGrp="1"/>
+          </p:cNvGraphicFramePr>
+          <p:nvPr>
+            <p:extLst>
+              <p:ext uri="{D42A27DB-BD31-4B8C-83A1-F6EECF244321}">
+                <p14:modId xmlns:p14="http://schemas.microsoft.com/office/powerpoint/2010/main" val="1383245044"/>
+              </p:ext>
+            </p:extLst>
+          </p:nvPr>
+        </p:nvGraphicFramePr>
+        <p:xfrm>
+          <a:off x="6959600" y="2336542"/>
+          <a:ext cx="5232400" cy="1104900"/>
+        </p:xfrm>
+        <a:graphic>
+          <a:graphicData uri="http://schemas.openxmlformats.org/drawingml/2006/table">
+            <a:tbl>
+              <a:tblPr/>
+              <a:tblGrid>
+                <a:gridCol w="533400">
+                  <a:extLst>
+                    <a:ext uri="{9D8B030D-6E8A-4147-A177-3AD203B41FA5}">
+                      <a16:colId xmlns:a16="http://schemas.microsoft.com/office/drawing/2014/main" val="3647774015"/>
+                    </a:ext>
+                  </a:extLst>
+                </a:gridCol>
+                <a:gridCol w="546100">
+                  <a:extLst>
+                    <a:ext uri="{9D8B030D-6E8A-4147-A177-3AD203B41FA5}">
+                      <a16:colId xmlns:a16="http://schemas.microsoft.com/office/drawing/2014/main" val="2581305539"/>
+                    </a:ext>
+                  </a:extLst>
+                </a:gridCol>
+                <a:gridCol w="698500">
+                  <a:extLst>
+                    <a:ext uri="{9D8B030D-6E8A-4147-A177-3AD203B41FA5}">
+                      <a16:colId xmlns:a16="http://schemas.microsoft.com/office/drawing/2014/main" val="1013172671"/>
+                    </a:ext>
+                  </a:extLst>
+                </a:gridCol>
+                <a:gridCol w="787400">
+                  <a:extLst>
+                    <a:ext uri="{9D8B030D-6E8A-4147-A177-3AD203B41FA5}">
+                      <a16:colId xmlns:a16="http://schemas.microsoft.com/office/drawing/2014/main" val="3055245637"/>
+                    </a:ext>
+                  </a:extLst>
+                </a:gridCol>
+                <a:gridCol w="965200">
+                  <a:extLst>
+                    <a:ext uri="{9D8B030D-6E8A-4147-A177-3AD203B41FA5}">
+                      <a16:colId xmlns:a16="http://schemas.microsoft.com/office/drawing/2014/main" val="2851156038"/>
+                    </a:ext>
+                  </a:extLst>
+                </a:gridCol>
+                <a:gridCol w="736600">
+                  <a:extLst>
+                    <a:ext uri="{9D8B030D-6E8A-4147-A177-3AD203B41FA5}">
+                      <a16:colId xmlns:a16="http://schemas.microsoft.com/office/drawing/2014/main" val="284086950"/>
+                    </a:ext>
+                  </a:extLst>
+                </a:gridCol>
+                <a:gridCol w="965200">
+                  <a:extLst>
+                    <a:ext uri="{9D8B030D-6E8A-4147-A177-3AD203B41FA5}">
+                      <a16:colId xmlns:a16="http://schemas.microsoft.com/office/drawing/2014/main" val="1763400996"/>
+                    </a:ext>
+                  </a:extLst>
+                </a:gridCol>
+              </a:tblGrid>
+              <a:tr h="276225">
+                <a:tc>
+                  <a:txBody>
+                    <a:bodyPr/>
+                    <a:lstStyle/>
+                    <a:p>
+                      <a:pPr algn="l" fontAlgn="t">
+                        <a:buNone/>
+                      </a:pPr>
+                      <a:r>
+                        <a:rPr lang="en-ID" sz="1100" b="1" i="0" u="none" strike="noStrike">
+                          <a:solidFill>
+                            <a:srgbClr val="000000"/>
+                          </a:solidFill>
+                          <a:effectLst/>
+                          <a:latin typeface="Segoe UI" panose="020B0502040204020203" pitchFamily="34" charset="0"/>
+                        </a:rPr>
+                        <a:t>Zone</a:t>
+                      </a:r>
+                    </a:p>
+                  </a:txBody>
+                  <a:tcPr marL="9525" marR="9525" marT="9525" marB="0">
+                    <a:lnL>
+                      <a:noFill/>
+                    </a:lnL>
+                    <a:lnR>
+                      <a:noFill/>
+                    </a:lnR>
+                    <a:lnT>
+                      <a:noFill/>
+                    </a:lnT>
+                    <a:lnB w="6350" cap="flat" cmpd="sng" algn="ctr">
+                      <a:solidFill>
+                        <a:srgbClr val="000000"/>
+                      </a:solidFill>
+                      <a:prstDash val="solid"/>
+                      <a:round/>
+                      <a:headEnd type="none" w="med" len="med"/>
+                      <a:tailEnd type="none" w="med" len="med"/>
+                    </a:lnB>
+                    <a:noFill/>
+                  </a:tcPr>
+                </a:tc>
+                <a:tc>
+                  <a:txBody>
+                    <a:bodyPr/>
+                    <a:lstStyle/>
+                    <a:p>
+                      <a:pPr algn="r" fontAlgn="t">
+                        <a:buNone/>
+                      </a:pPr>
+                      <a:r>
+                        <a:rPr lang="en-ID" sz="1100" b="1" i="0" u="none" strike="noStrike">
+                          <a:solidFill>
+                            <a:srgbClr val="000000"/>
+                          </a:solidFill>
+                          <a:effectLst/>
+                          <a:latin typeface="Segoe UI" panose="020B0502040204020203" pitchFamily="34" charset="0"/>
+                        </a:rPr>
+                        <a:t>Count</a:t>
+                      </a:r>
+                    </a:p>
+                  </a:txBody>
+                  <a:tcPr marL="9525" marR="9525" marT="9525" marB="0">
+                    <a:lnL>
+                      <a:noFill/>
+                    </a:lnL>
+                    <a:lnR>
+                      <a:noFill/>
+                    </a:lnR>
+                    <a:lnT>
+                      <a:noFill/>
+                    </a:lnT>
+                    <a:lnB w="6350" cap="flat" cmpd="sng" algn="ctr">
+                      <a:solidFill>
+                        <a:srgbClr val="000000"/>
+                      </a:solidFill>
+                      <a:prstDash val="solid"/>
+                      <a:round/>
+                      <a:headEnd type="none" w="med" len="med"/>
+                      <a:tailEnd type="none" w="med" len="med"/>
+                    </a:lnB>
+                    <a:noFill/>
+                  </a:tcPr>
+                </a:tc>
+                <a:tc>
+                  <a:txBody>
+                    <a:bodyPr/>
+                    <a:lstStyle/>
+                    <a:p>
+                      <a:pPr algn="r" fontAlgn="t">
+                        <a:buNone/>
+                      </a:pPr>
+                      <a:r>
+                        <a:rPr lang="en-ID" sz="1100" b="1" i="0" u="none" strike="noStrike">
+                          <a:solidFill>
+                            <a:srgbClr val="000000"/>
+                          </a:solidFill>
+                          <a:effectLst/>
+                          <a:latin typeface="Segoe UI" panose="020B0502040204020203" pitchFamily="34" charset="0"/>
+                        </a:rPr>
+                        <a:t>Variety</a:t>
+                      </a:r>
+                    </a:p>
+                  </a:txBody>
+                  <a:tcPr marL="9525" marR="9525" marT="9525" marB="0">
+                    <a:lnL>
+                      <a:noFill/>
+                    </a:lnL>
+                    <a:lnR>
+                      <a:noFill/>
+                    </a:lnR>
+                    <a:lnT>
+                      <a:noFill/>
+                    </a:lnT>
+                    <a:lnB w="6350" cap="flat" cmpd="sng" algn="ctr">
+                      <a:solidFill>
+                        <a:srgbClr val="000000"/>
+                      </a:solidFill>
+                      <a:prstDash val="solid"/>
+                      <a:round/>
+                      <a:headEnd type="none" w="med" len="med"/>
+                      <a:tailEnd type="none" w="med" len="med"/>
+                    </a:lnB>
+                    <a:noFill/>
+                  </a:tcPr>
+                </a:tc>
+                <a:tc>
+                  <a:txBody>
+                    <a:bodyPr/>
+                    <a:lstStyle/>
+                    <a:p>
+                      <a:pPr algn="r" fontAlgn="t">
+                        <a:buNone/>
+                      </a:pPr>
+                      <a:r>
+                        <a:rPr lang="en-ID" sz="1100" b="1" i="0" u="none" strike="noStrike">
+                          <a:solidFill>
+                            <a:srgbClr val="000000"/>
+                          </a:solidFill>
+                          <a:effectLst/>
+                          <a:latin typeface="Segoe UI" panose="020B0502040204020203" pitchFamily="34" charset="0"/>
+                        </a:rPr>
+                        <a:t>Majority</a:t>
+                      </a:r>
+                    </a:p>
+                  </a:txBody>
+                  <a:tcPr marL="9525" marR="9525" marT="9525" marB="0">
+                    <a:lnL>
+                      <a:noFill/>
+                    </a:lnL>
+                    <a:lnR>
+                      <a:noFill/>
+                    </a:lnR>
+                    <a:lnT>
+                      <a:noFill/>
+                    </a:lnT>
+                    <a:lnB w="6350" cap="flat" cmpd="sng" algn="ctr">
+                      <a:solidFill>
+                        <a:srgbClr val="000000"/>
+                      </a:solidFill>
+                      <a:prstDash val="solid"/>
+                      <a:round/>
+                      <a:headEnd type="none" w="med" len="med"/>
+                      <a:tailEnd type="none" w="med" len="med"/>
+                    </a:lnB>
+                    <a:noFill/>
+                  </a:tcPr>
+                </a:tc>
+                <a:tc>
+                  <a:txBody>
+                    <a:bodyPr/>
+                    <a:lstStyle/>
+                    <a:p>
+                      <a:pPr algn="r" fontAlgn="t">
+                        <a:buNone/>
+                      </a:pPr>
+                      <a:r>
+                        <a:rPr lang="en-ID" sz="1100" b="1" i="0" u="none" strike="noStrike">
+                          <a:solidFill>
+                            <a:srgbClr val="000000"/>
+                          </a:solidFill>
+                          <a:effectLst/>
+                          <a:latin typeface="Segoe UI" panose="020B0502040204020203" pitchFamily="34" charset="0"/>
+                        </a:rPr>
+                        <a:t>Majority %</a:t>
+                      </a:r>
+                    </a:p>
+                  </a:txBody>
+                  <a:tcPr marL="9525" marR="9525" marT="9525" marB="0">
+                    <a:lnL>
+                      <a:noFill/>
+                    </a:lnL>
+                    <a:lnR>
+                      <a:noFill/>
+                    </a:lnR>
+                    <a:lnT>
+                      <a:noFill/>
+                    </a:lnT>
+                    <a:lnB w="6350" cap="flat" cmpd="sng" algn="ctr">
+                      <a:solidFill>
+                        <a:srgbClr val="000000"/>
+                      </a:solidFill>
+                      <a:prstDash val="solid"/>
+                      <a:round/>
+                      <a:headEnd type="none" w="med" len="med"/>
+                      <a:tailEnd type="none" w="med" len="med"/>
+                    </a:lnB>
+                    <a:noFill/>
+                  </a:tcPr>
+                </a:tc>
+                <a:tc>
+                  <a:txBody>
+                    <a:bodyPr/>
+                    <a:lstStyle/>
+                    <a:p>
+                      <a:pPr algn="r" fontAlgn="t">
+                        <a:buNone/>
+                      </a:pPr>
+                      <a:r>
+                        <a:rPr lang="en-ID" sz="1100" b="1" i="0" u="none" strike="noStrike">
+                          <a:solidFill>
+                            <a:srgbClr val="000000"/>
+                          </a:solidFill>
+                          <a:effectLst/>
+                          <a:latin typeface="Segoe UI" panose="020B0502040204020203" pitchFamily="34" charset="0"/>
+                        </a:rPr>
+                        <a:t>Minority</a:t>
+                      </a:r>
+                    </a:p>
+                  </a:txBody>
+                  <a:tcPr marL="9525" marR="9525" marT="9525" marB="0">
+                    <a:lnL>
+                      <a:noFill/>
+                    </a:lnL>
+                    <a:lnR>
+                      <a:noFill/>
+                    </a:lnR>
+                    <a:lnT>
+                      <a:noFill/>
+                    </a:lnT>
+                    <a:lnB w="6350" cap="flat" cmpd="sng" algn="ctr">
+                      <a:solidFill>
+                        <a:srgbClr val="000000"/>
+                      </a:solidFill>
+                      <a:prstDash val="solid"/>
+                      <a:round/>
+                      <a:headEnd type="none" w="med" len="med"/>
+                      <a:tailEnd type="none" w="med" len="med"/>
+                    </a:lnB>
+                    <a:noFill/>
+                  </a:tcPr>
+                </a:tc>
+                <a:tc>
+                  <a:txBody>
+                    <a:bodyPr/>
+                    <a:lstStyle/>
+                    <a:p>
+                      <a:pPr algn="r" fontAlgn="t">
+                        <a:buNone/>
+                      </a:pPr>
+                      <a:r>
+                        <a:rPr lang="en-ID" sz="1100" b="1" i="0" u="none" strike="noStrike">
+                          <a:solidFill>
+                            <a:srgbClr val="000000"/>
+                          </a:solidFill>
+                          <a:effectLst/>
+                          <a:latin typeface="Segoe UI" panose="020B0502040204020203" pitchFamily="34" charset="0"/>
+                        </a:rPr>
+                        <a:t>Minority %</a:t>
+                      </a:r>
+                    </a:p>
+                  </a:txBody>
+                  <a:tcPr marL="9525" marR="9525" marT="9525" marB="0">
+                    <a:lnL>
+                      <a:noFill/>
+                    </a:lnL>
+                    <a:lnR>
+                      <a:noFill/>
+                    </a:lnR>
+                    <a:lnT>
+                      <a:noFill/>
+                    </a:lnT>
+                    <a:lnB w="6350" cap="flat" cmpd="sng" algn="ctr">
+                      <a:solidFill>
+                        <a:srgbClr val="000000"/>
+                      </a:solidFill>
+                      <a:prstDash val="solid"/>
+                      <a:round/>
+                      <a:headEnd type="none" w="med" len="med"/>
+                      <a:tailEnd type="none" w="med" len="med"/>
+                    </a:lnB>
+                    <a:noFill/>
+                  </a:tcPr>
+                </a:tc>
+                <a:extLst>
+                  <a:ext uri="{0D108BD9-81ED-4DB2-BD59-A6C34878D82A}">
+                    <a16:rowId xmlns:a16="http://schemas.microsoft.com/office/drawing/2014/main" val="321811979"/>
+                  </a:ext>
+                </a:extLst>
+              </a:tr>
+              <a:tr h="276225">
+                <a:tc>
+                  <a:txBody>
+                    <a:bodyPr/>
+                    <a:lstStyle/>
+                    <a:p>
+                      <a:pPr algn="l" fontAlgn="b">
+                        <a:buNone/>
+                      </a:pPr>
+                      <a:r>
+                        <a:rPr lang="en-ID" sz="1100" b="0" i="0" u="none" strike="noStrike">
+                          <a:solidFill>
+                            <a:srgbClr val="000000"/>
+                          </a:solidFill>
+                          <a:effectLst/>
+                          <a:latin typeface="Segoe UI" panose="020B0502040204020203" pitchFamily="34" charset="0"/>
+                        </a:rPr>
+                        <a:t>A</a:t>
+                      </a:r>
+                    </a:p>
+                  </a:txBody>
+                  <a:tcPr marL="9525" marR="9525" marT="9525" marB="0" anchor="b">
+                    <a:lnL>
+                      <a:noFill/>
+                    </a:lnL>
+                    <a:lnR>
+                      <a:noFill/>
+                    </a:lnR>
+                    <a:lnT w="6350" cap="flat" cmpd="sng" algn="ctr">
+                      <a:solidFill>
+                        <a:srgbClr val="000000"/>
+                      </a:solidFill>
+                      <a:prstDash val="solid"/>
+                      <a:round/>
+                      <a:headEnd type="none" w="med" len="med"/>
+                      <a:tailEnd type="none" w="med" len="med"/>
+                    </a:lnT>
+                    <a:lnB>
+                      <a:noFill/>
+                    </a:lnB>
+                    <a:noFill/>
+                  </a:tcPr>
+                </a:tc>
+                <a:tc>
+                  <a:txBody>
+                    <a:bodyPr/>
+                    <a:lstStyle/>
+                    <a:p>
+                      <a:pPr algn="r" fontAlgn="b">
+                        <a:buNone/>
+                      </a:pPr>
+                      <a:r>
+                        <a:rPr lang="en-ID" sz="1100" b="0" i="0" u="none" strike="noStrike">
+                          <a:solidFill>
+                            <a:srgbClr val="000000"/>
+                          </a:solidFill>
+                          <a:effectLst/>
+                          <a:latin typeface="Segoe UI" panose="020B0502040204020203" pitchFamily="34" charset="0"/>
+                        </a:rPr>
+                        <a:t>6</a:t>
+                      </a:r>
+                    </a:p>
+                  </a:txBody>
+                  <a:tcPr marL="9525" marR="9525" marT="9525" marB="0" anchor="b">
+                    <a:lnL>
+                      <a:noFill/>
+                    </a:lnL>
+                    <a:lnR>
+                      <a:noFill/>
+                    </a:lnR>
+                    <a:lnT w="6350" cap="flat" cmpd="sng" algn="ctr">
+                      <a:solidFill>
+                        <a:srgbClr val="000000"/>
+                      </a:solidFill>
+                      <a:prstDash val="solid"/>
+                      <a:round/>
+                      <a:headEnd type="none" w="med" len="med"/>
+                      <a:tailEnd type="none" w="med" len="med"/>
+                    </a:lnT>
+                    <a:lnB>
+                      <a:noFill/>
+                    </a:lnB>
+                    <a:noFill/>
+                  </a:tcPr>
+                </a:tc>
+                <a:tc>
+                  <a:txBody>
+                    <a:bodyPr/>
+                    <a:lstStyle/>
+                    <a:p>
+                      <a:pPr algn="r" fontAlgn="b">
+                        <a:buNone/>
+                      </a:pPr>
+                      <a:r>
+                        <a:rPr lang="en-ID" sz="1100" b="0" i="0" u="none" strike="noStrike">
+                          <a:solidFill>
+                            <a:srgbClr val="000000"/>
+                          </a:solidFill>
+                          <a:effectLst/>
+                          <a:latin typeface="Segoe UI" panose="020B0502040204020203" pitchFamily="34" charset="0"/>
+                        </a:rPr>
+                        <a:t>2</a:t>
+                      </a:r>
+                    </a:p>
+                  </a:txBody>
+                  <a:tcPr marL="9525" marR="9525" marT="9525" marB="0" anchor="b">
+                    <a:lnL>
+                      <a:noFill/>
+                    </a:lnL>
+                    <a:lnR>
+                      <a:noFill/>
+                    </a:lnR>
+                    <a:lnT w="6350" cap="flat" cmpd="sng" algn="ctr">
+                      <a:solidFill>
+                        <a:srgbClr val="000000"/>
+                      </a:solidFill>
+                      <a:prstDash val="solid"/>
+                      <a:round/>
+                      <a:headEnd type="none" w="med" len="med"/>
+                      <a:tailEnd type="none" w="med" len="med"/>
+                    </a:lnT>
+                    <a:lnB>
+                      <a:noFill/>
+                    </a:lnB>
+                    <a:noFill/>
+                  </a:tcPr>
+                </a:tc>
+                <a:tc>
+                  <a:txBody>
+                    <a:bodyPr/>
+                    <a:lstStyle/>
+                    <a:p>
+                      <a:pPr algn="r" fontAlgn="b">
+                        <a:buNone/>
+                      </a:pPr>
+                      <a:r>
+                        <a:rPr lang="en-ID" sz="1100" b="0" i="0" u="none" strike="noStrike">
+                          <a:solidFill>
+                            <a:srgbClr val="000000"/>
+                          </a:solidFill>
+                          <a:effectLst/>
+                          <a:latin typeface="Segoe UI" panose="020B0502040204020203" pitchFamily="34" charset="0"/>
+                        </a:rPr>
+                        <a:t>5</a:t>
+                      </a:r>
+                    </a:p>
+                  </a:txBody>
+                  <a:tcPr marL="9525" marR="9525" marT="9525" marB="0" anchor="b">
+                    <a:lnL>
+                      <a:noFill/>
+                    </a:lnL>
+                    <a:lnR>
+                      <a:noFill/>
+                    </a:lnR>
+                    <a:lnT w="6350" cap="flat" cmpd="sng" algn="ctr">
+                      <a:solidFill>
+                        <a:srgbClr val="000000"/>
+                      </a:solidFill>
+                      <a:prstDash val="solid"/>
+                      <a:round/>
+                      <a:headEnd type="none" w="med" len="med"/>
+                      <a:tailEnd type="none" w="med" len="med"/>
+                    </a:lnT>
+                    <a:lnB>
+                      <a:noFill/>
+                    </a:lnB>
+                    <a:noFill/>
+                  </a:tcPr>
+                </a:tc>
+                <a:tc>
+                  <a:txBody>
+                    <a:bodyPr/>
+                    <a:lstStyle/>
+                    <a:p>
+                      <a:pPr algn="l" fontAlgn="b">
+                        <a:buNone/>
+                      </a:pPr>
+                      <a:r>
+                        <a:rPr lang="en-ID" sz="1100" b="0" i="0" u="none" strike="noStrike">
+                          <a:solidFill>
+                            <a:srgbClr val="000000"/>
+                          </a:solidFill>
+                          <a:effectLst/>
+                          <a:latin typeface="Segoe UI" panose="020B0502040204020203" pitchFamily="34" charset="0"/>
+                        </a:rPr>
+                        <a:t>                83.3 </a:t>
+                      </a:r>
+                    </a:p>
+                  </a:txBody>
+                  <a:tcPr marL="9525" marR="9525" marT="9525" marB="0" anchor="b">
+                    <a:lnL>
+                      <a:noFill/>
+                    </a:lnL>
+                    <a:lnR>
+                      <a:noFill/>
+                    </a:lnR>
+                    <a:lnT w="6350" cap="flat" cmpd="sng" algn="ctr">
+                      <a:solidFill>
+                        <a:srgbClr val="000000"/>
+                      </a:solidFill>
+                      <a:prstDash val="solid"/>
+                      <a:round/>
+                      <a:headEnd type="none" w="med" len="med"/>
+                      <a:tailEnd type="none" w="med" len="med"/>
+                    </a:lnT>
+                    <a:lnB>
+                      <a:noFill/>
+                    </a:lnB>
+                    <a:noFill/>
+                  </a:tcPr>
+                </a:tc>
+                <a:tc>
+                  <a:txBody>
+                    <a:bodyPr/>
+                    <a:lstStyle/>
+                    <a:p>
+                      <a:pPr algn="r" fontAlgn="b">
+                        <a:buNone/>
+                      </a:pPr>
+                      <a:r>
+                        <a:rPr lang="en-ID" sz="1100" b="0" i="0" u="none" strike="noStrike">
+                          <a:solidFill>
+                            <a:srgbClr val="000000"/>
+                          </a:solidFill>
+                          <a:effectLst/>
+                          <a:latin typeface="Segoe UI" panose="020B0502040204020203" pitchFamily="34" charset="0"/>
+                        </a:rPr>
+                        <a:t>1</a:t>
+                      </a:r>
+                    </a:p>
+                  </a:txBody>
+                  <a:tcPr marL="9525" marR="9525" marT="9525" marB="0" anchor="b">
+                    <a:lnL>
+                      <a:noFill/>
+                    </a:lnL>
+                    <a:lnR>
+                      <a:noFill/>
+                    </a:lnR>
+                    <a:lnT w="6350" cap="flat" cmpd="sng" algn="ctr">
+                      <a:solidFill>
+                        <a:srgbClr val="000000"/>
+                      </a:solidFill>
+                      <a:prstDash val="solid"/>
+                      <a:round/>
+                      <a:headEnd type="none" w="med" len="med"/>
+                      <a:tailEnd type="none" w="med" len="med"/>
+                    </a:lnT>
+                    <a:lnB>
+                      <a:noFill/>
+                    </a:lnB>
+                    <a:noFill/>
+                  </a:tcPr>
+                </a:tc>
+                <a:tc>
+                  <a:txBody>
+                    <a:bodyPr/>
+                    <a:lstStyle/>
+                    <a:p>
+                      <a:pPr algn="l" fontAlgn="b">
+                        <a:buNone/>
+                      </a:pPr>
+                      <a:r>
+                        <a:rPr lang="en-ID" sz="1100" b="0" i="0" u="none" strike="noStrike">
+                          <a:solidFill>
+                            <a:srgbClr val="000000"/>
+                          </a:solidFill>
+                          <a:effectLst/>
+                          <a:latin typeface="Segoe UI" panose="020B0502040204020203" pitchFamily="34" charset="0"/>
+                        </a:rPr>
+                        <a:t>                16.7 </a:t>
+                      </a:r>
+                    </a:p>
+                  </a:txBody>
+                  <a:tcPr marL="9525" marR="9525" marT="9525" marB="0" anchor="b">
+                    <a:lnL>
+                      <a:noFill/>
+                    </a:lnL>
+                    <a:lnR>
+                      <a:noFill/>
+                    </a:lnR>
+                    <a:lnT w="6350" cap="flat" cmpd="sng" algn="ctr">
+                      <a:solidFill>
+                        <a:srgbClr val="000000"/>
+                      </a:solidFill>
+                      <a:prstDash val="solid"/>
+                      <a:round/>
+                      <a:headEnd type="none" w="med" len="med"/>
+                      <a:tailEnd type="none" w="med" len="med"/>
+                    </a:lnT>
+                    <a:lnB>
+                      <a:noFill/>
+                    </a:lnB>
+                    <a:noFill/>
+                  </a:tcPr>
+                </a:tc>
+                <a:extLst>
+                  <a:ext uri="{0D108BD9-81ED-4DB2-BD59-A6C34878D82A}">
+                    <a16:rowId xmlns:a16="http://schemas.microsoft.com/office/drawing/2014/main" val="1722311377"/>
+                  </a:ext>
+                </a:extLst>
+              </a:tr>
+              <a:tr h="276225">
+                <a:tc>
+                  <a:txBody>
+                    <a:bodyPr/>
+                    <a:lstStyle/>
+                    <a:p>
+                      <a:pPr algn="l" fontAlgn="b">
+                        <a:buNone/>
+                      </a:pPr>
+                      <a:r>
+                        <a:rPr lang="en-ID" sz="1100" b="0" i="0" u="none" strike="noStrike">
+                          <a:solidFill>
+                            <a:srgbClr val="000000"/>
+                          </a:solidFill>
+                          <a:effectLst/>
+                          <a:latin typeface="Segoe UI" panose="020B0502040204020203" pitchFamily="34" charset="0"/>
+                        </a:rPr>
+                        <a:t>B</a:t>
+                      </a:r>
+                    </a:p>
+                  </a:txBody>
+                  <a:tcPr marL="9525" marR="9525" marT="9525" marB="0" anchor="b">
+                    <a:lnL>
+                      <a:noFill/>
+                    </a:lnL>
+                    <a:lnR>
+                      <a:noFill/>
+                    </a:lnR>
+                    <a:lnT>
+                      <a:noFill/>
+                    </a:lnT>
+                    <a:lnB>
+                      <a:noFill/>
+                    </a:lnB>
+                    <a:noFill/>
+                  </a:tcPr>
+                </a:tc>
+                <a:tc>
+                  <a:txBody>
+                    <a:bodyPr/>
+                    <a:lstStyle/>
+                    <a:p>
+                      <a:pPr algn="r" fontAlgn="b">
+                        <a:buNone/>
+                      </a:pPr>
+                      <a:r>
+                        <a:rPr lang="en-ID" sz="1100" b="0" i="0" u="none" strike="noStrike">
+                          <a:solidFill>
+                            <a:srgbClr val="000000"/>
+                          </a:solidFill>
+                          <a:effectLst/>
+                          <a:latin typeface="Segoe UI" panose="020B0502040204020203" pitchFamily="34" charset="0"/>
+                        </a:rPr>
+                        <a:t>8</a:t>
+                      </a:r>
+                    </a:p>
+                  </a:txBody>
+                  <a:tcPr marL="9525" marR="9525" marT="9525" marB="0" anchor="b">
+                    <a:lnL>
+                      <a:noFill/>
+                    </a:lnL>
+                    <a:lnR>
+                      <a:noFill/>
+                    </a:lnR>
+                    <a:lnT>
+                      <a:noFill/>
+                    </a:lnT>
+                    <a:lnB>
+                      <a:noFill/>
+                    </a:lnB>
+                    <a:noFill/>
+                  </a:tcPr>
+                </a:tc>
+                <a:tc>
+                  <a:txBody>
+                    <a:bodyPr/>
+                    <a:lstStyle/>
+                    <a:p>
+                      <a:pPr algn="r" fontAlgn="b">
+                        <a:buNone/>
+                      </a:pPr>
+                      <a:r>
+                        <a:rPr lang="en-ID" sz="1100" b="0" i="0" u="none" strike="noStrike">
+                          <a:solidFill>
+                            <a:srgbClr val="000000"/>
+                          </a:solidFill>
+                          <a:effectLst/>
+                          <a:latin typeface="Segoe UI" panose="020B0502040204020203" pitchFamily="34" charset="0"/>
+                        </a:rPr>
+                        <a:t>2</a:t>
+                      </a:r>
+                    </a:p>
+                  </a:txBody>
+                  <a:tcPr marL="9525" marR="9525" marT="9525" marB="0" anchor="b">
+                    <a:lnL>
+                      <a:noFill/>
+                    </a:lnL>
+                    <a:lnR>
+                      <a:noFill/>
+                    </a:lnR>
+                    <a:lnT>
+                      <a:noFill/>
+                    </a:lnT>
+                    <a:lnB>
+                      <a:noFill/>
+                    </a:lnB>
+                    <a:noFill/>
+                  </a:tcPr>
+                </a:tc>
+                <a:tc>
+                  <a:txBody>
+                    <a:bodyPr/>
+                    <a:lstStyle/>
+                    <a:p>
+                      <a:pPr algn="r" fontAlgn="b">
+                        <a:buNone/>
+                      </a:pPr>
+                      <a:r>
+                        <a:rPr lang="en-ID" sz="1100" b="0" i="0" u="none" strike="noStrike">
+                          <a:solidFill>
+                            <a:srgbClr val="000000"/>
+                          </a:solidFill>
+                          <a:effectLst/>
+                          <a:latin typeface="Segoe UI" panose="020B0502040204020203" pitchFamily="34" charset="0"/>
+                        </a:rPr>
+                        <a:t>5</a:t>
+                      </a:r>
+                    </a:p>
+                  </a:txBody>
+                  <a:tcPr marL="9525" marR="9525" marT="9525" marB="0" anchor="b">
+                    <a:lnL>
+                      <a:noFill/>
+                    </a:lnL>
+                    <a:lnR>
+                      <a:noFill/>
+                    </a:lnR>
+                    <a:lnT>
+                      <a:noFill/>
+                    </a:lnT>
+                    <a:lnB>
+                      <a:noFill/>
+                    </a:lnB>
+                    <a:noFill/>
+                  </a:tcPr>
+                </a:tc>
+                <a:tc>
+                  <a:txBody>
+                    <a:bodyPr/>
+                    <a:lstStyle/>
+                    <a:p>
+                      <a:pPr algn="l" fontAlgn="b">
+                        <a:buNone/>
+                      </a:pPr>
+                      <a:r>
+                        <a:rPr lang="en-ID" sz="1100" b="0" i="0" u="none" strike="noStrike">
+                          <a:solidFill>
+                            <a:srgbClr val="000000"/>
+                          </a:solidFill>
+                          <a:effectLst/>
+                          <a:latin typeface="Segoe UI" panose="020B0502040204020203" pitchFamily="34" charset="0"/>
+                        </a:rPr>
+                        <a:t>                87.5 </a:t>
+                      </a:r>
+                    </a:p>
+                  </a:txBody>
+                  <a:tcPr marL="9525" marR="9525" marT="9525" marB="0" anchor="b">
+                    <a:lnL>
+                      <a:noFill/>
+                    </a:lnL>
+                    <a:lnR>
+                      <a:noFill/>
+                    </a:lnR>
+                    <a:lnT>
+                      <a:noFill/>
+                    </a:lnT>
+                    <a:lnB>
+                      <a:noFill/>
+                    </a:lnB>
+                    <a:noFill/>
+                  </a:tcPr>
+                </a:tc>
+                <a:tc>
+                  <a:txBody>
+                    <a:bodyPr/>
+                    <a:lstStyle/>
+                    <a:p>
+                      <a:pPr algn="r" fontAlgn="b">
+                        <a:buNone/>
+                      </a:pPr>
+                      <a:r>
+                        <a:rPr lang="en-ID" sz="1100" b="0" i="0" u="none" strike="noStrike">
+                          <a:solidFill>
+                            <a:srgbClr val="000000"/>
+                          </a:solidFill>
+                          <a:effectLst/>
+                          <a:latin typeface="Segoe UI" panose="020B0502040204020203" pitchFamily="34" charset="0"/>
+                        </a:rPr>
+                        <a:t>1</a:t>
+                      </a:r>
+                    </a:p>
+                  </a:txBody>
+                  <a:tcPr marL="9525" marR="9525" marT="9525" marB="0" anchor="b">
+                    <a:lnL>
+                      <a:noFill/>
+                    </a:lnL>
+                    <a:lnR>
+                      <a:noFill/>
+                    </a:lnR>
+                    <a:lnT>
+                      <a:noFill/>
+                    </a:lnT>
+                    <a:lnB>
+                      <a:noFill/>
+                    </a:lnB>
+                    <a:noFill/>
+                  </a:tcPr>
+                </a:tc>
+                <a:tc>
+                  <a:txBody>
+                    <a:bodyPr/>
+                    <a:lstStyle/>
+                    <a:p>
+                      <a:pPr algn="l" fontAlgn="b">
+                        <a:buNone/>
+                      </a:pPr>
+                      <a:r>
+                        <a:rPr lang="en-ID" sz="1100" b="0" i="0" u="none" strike="noStrike">
+                          <a:solidFill>
+                            <a:srgbClr val="000000"/>
+                          </a:solidFill>
+                          <a:effectLst/>
+                          <a:latin typeface="Segoe UI" panose="020B0502040204020203" pitchFamily="34" charset="0"/>
+                        </a:rPr>
+                        <a:t>                25.0 </a:t>
+                      </a:r>
+                    </a:p>
+                  </a:txBody>
+                  <a:tcPr marL="9525" marR="9525" marT="9525" marB="0" anchor="b">
+                    <a:lnL>
+                      <a:noFill/>
+                    </a:lnL>
+                    <a:lnR>
+                      <a:noFill/>
+                    </a:lnR>
+                    <a:lnT>
+                      <a:noFill/>
+                    </a:lnT>
+                    <a:lnB>
+                      <a:noFill/>
+                    </a:lnB>
+                    <a:noFill/>
+                  </a:tcPr>
+                </a:tc>
+                <a:extLst>
+                  <a:ext uri="{0D108BD9-81ED-4DB2-BD59-A6C34878D82A}">
+                    <a16:rowId xmlns:a16="http://schemas.microsoft.com/office/drawing/2014/main" val="3478385412"/>
+                  </a:ext>
+                </a:extLst>
+              </a:tr>
+              <a:tr h="276225">
+                <a:tc>
+                  <a:txBody>
+                    <a:bodyPr/>
+                    <a:lstStyle/>
+                    <a:p>
+                      <a:pPr algn="l" fontAlgn="b">
+                        <a:buNone/>
+                      </a:pPr>
+                      <a:r>
+                        <a:rPr lang="en-ID" sz="1100" b="0" i="0" u="none" strike="noStrike">
+                          <a:solidFill>
+                            <a:srgbClr val="000000"/>
+                          </a:solidFill>
+                          <a:effectLst/>
+                          <a:latin typeface="Segoe UI" panose="020B0502040204020203" pitchFamily="34" charset="0"/>
+                        </a:rPr>
+                        <a:t>C</a:t>
+                      </a:r>
+                    </a:p>
+                  </a:txBody>
+                  <a:tcPr marL="9525" marR="9525" marT="9525" marB="0" anchor="b">
+                    <a:lnL>
+                      <a:noFill/>
+                    </a:lnL>
+                    <a:lnR>
+                      <a:noFill/>
+                    </a:lnR>
+                    <a:lnT>
+                      <a:noFill/>
+                    </a:lnT>
+                    <a:lnB>
+                      <a:noFill/>
+                    </a:lnB>
+                    <a:noFill/>
+                  </a:tcPr>
+                </a:tc>
+                <a:tc>
+                  <a:txBody>
+                    <a:bodyPr/>
+                    <a:lstStyle/>
+                    <a:p>
+                      <a:pPr algn="r" fontAlgn="b">
+                        <a:buNone/>
+                      </a:pPr>
+                      <a:r>
+                        <a:rPr lang="en-ID" sz="1100" b="0" i="0" u="none" strike="noStrike">
+                          <a:solidFill>
+                            <a:srgbClr val="000000"/>
+                          </a:solidFill>
+                          <a:effectLst/>
+                          <a:latin typeface="Segoe UI" panose="020B0502040204020203" pitchFamily="34" charset="0"/>
+                        </a:rPr>
+                        <a:t>13</a:t>
+                      </a:r>
+                    </a:p>
+                  </a:txBody>
+                  <a:tcPr marL="9525" marR="9525" marT="9525" marB="0" anchor="b">
+                    <a:lnL>
+                      <a:noFill/>
+                    </a:lnL>
+                    <a:lnR>
+                      <a:noFill/>
+                    </a:lnR>
+                    <a:lnT>
+                      <a:noFill/>
+                    </a:lnT>
+                    <a:lnB>
+                      <a:noFill/>
+                    </a:lnB>
+                    <a:noFill/>
+                  </a:tcPr>
+                </a:tc>
+                <a:tc>
+                  <a:txBody>
+                    <a:bodyPr/>
+                    <a:lstStyle/>
+                    <a:p>
+                      <a:pPr algn="r" fontAlgn="b">
+                        <a:buNone/>
+                      </a:pPr>
+                      <a:r>
+                        <a:rPr lang="en-ID" sz="1100" b="0" i="0" u="none" strike="noStrike">
+                          <a:solidFill>
+                            <a:srgbClr val="000000"/>
+                          </a:solidFill>
+                          <a:effectLst/>
+                          <a:latin typeface="Segoe UI" panose="020B0502040204020203" pitchFamily="34" charset="0"/>
+                        </a:rPr>
+                        <a:t>3</a:t>
+                      </a:r>
+                    </a:p>
+                  </a:txBody>
+                  <a:tcPr marL="9525" marR="9525" marT="9525" marB="0" anchor="b">
+                    <a:lnL>
+                      <a:noFill/>
+                    </a:lnL>
+                    <a:lnR>
+                      <a:noFill/>
+                    </a:lnR>
+                    <a:lnT>
+                      <a:noFill/>
+                    </a:lnT>
+                    <a:lnB>
+                      <a:noFill/>
+                    </a:lnB>
+                    <a:noFill/>
+                  </a:tcPr>
+                </a:tc>
+                <a:tc>
+                  <a:txBody>
+                    <a:bodyPr/>
+                    <a:lstStyle/>
+                    <a:p>
+                      <a:pPr algn="r" fontAlgn="b">
+                        <a:buNone/>
+                      </a:pPr>
+                      <a:r>
+                        <a:rPr lang="en-ID" sz="1100" b="0" i="0" u="none" strike="noStrike">
+                          <a:solidFill>
+                            <a:srgbClr val="000000"/>
+                          </a:solidFill>
+                          <a:effectLst/>
+                          <a:latin typeface="Segoe UI" panose="020B0502040204020203" pitchFamily="34" charset="0"/>
+                        </a:rPr>
+                        <a:t>1</a:t>
+                      </a:r>
+                    </a:p>
+                  </a:txBody>
+                  <a:tcPr marL="9525" marR="9525" marT="9525" marB="0" anchor="b">
+                    <a:lnL>
+                      <a:noFill/>
+                    </a:lnL>
+                    <a:lnR>
+                      <a:noFill/>
+                    </a:lnR>
+                    <a:lnT>
+                      <a:noFill/>
+                    </a:lnT>
+                    <a:lnB>
+                      <a:noFill/>
+                    </a:lnB>
+                    <a:noFill/>
+                  </a:tcPr>
+                </a:tc>
+                <a:tc>
+                  <a:txBody>
+                    <a:bodyPr/>
+                    <a:lstStyle/>
+                    <a:p>
+                      <a:pPr algn="l" fontAlgn="b">
+                        <a:buNone/>
+                      </a:pPr>
+                      <a:r>
+                        <a:rPr lang="en-ID" sz="1100" b="0" i="0" u="none" strike="noStrike">
+                          <a:solidFill>
+                            <a:srgbClr val="FF0000"/>
+                          </a:solidFill>
+                          <a:effectLst/>
+                          <a:latin typeface="Segoe UI" panose="020B0502040204020203" pitchFamily="34" charset="0"/>
+                        </a:rPr>
+                        <a:t>                53.8 </a:t>
+                      </a:r>
+                    </a:p>
+                  </a:txBody>
+                  <a:tcPr marL="9525" marR="9525" marT="9525" marB="0" anchor="b">
+                    <a:lnL>
+                      <a:noFill/>
+                    </a:lnL>
+                    <a:lnR>
+                      <a:noFill/>
+                    </a:lnR>
+                    <a:lnT>
+                      <a:noFill/>
+                    </a:lnT>
+                    <a:lnB>
+                      <a:noFill/>
+                    </a:lnB>
+                    <a:noFill/>
+                  </a:tcPr>
+                </a:tc>
+                <a:tc>
+                  <a:txBody>
+                    <a:bodyPr/>
+                    <a:lstStyle/>
+                    <a:p>
+                      <a:pPr algn="r" fontAlgn="b">
+                        <a:buNone/>
+                      </a:pPr>
+                      <a:r>
+                        <a:rPr lang="en-ID" sz="1100" b="0" i="0" u="none" strike="noStrike">
+                          <a:solidFill>
+                            <a:srgbClr val="000000"/>
+                          </a:solidFill>
+                          <a:effectLst/>
+                          <a:latin typeface="Segoe UI" panose="020B0502040204020203" pitchFamily="34" charset="0"/>
+                        </a:rPr>
+                        <a:t>3</a:t>
+                      </a:r>
+                    </a:p>
+                  </a:txBody>
+                  <a:tcPr marL="9525" marR="9525" marT="9525" marB="0" anchor="b">
+                    <a:lnL>
+                      <a:noFill/>
+                    </a:lnL>
+                    <a:lnR>
+                      <a:noFill/>
+                    </a:lnR>
+                    <a:lnT>
+                      <a:noFill/>
+                    </a:lnT>
+                    <a:lnB>
+                      <a:noFill/>
+                    </a:lnB>
+                    <a:noFill/>
+                  </a:tcPr>
+                </a:tc>
+                <a:tc>
+                  <a:txBody>
+                    <a:bodyPr/>
+                    <a:lstStyle/>
+                    <a:p>
+                      <a:pPr algn="l" fontAlgn="b">
+                        <a:buNone/>
+                      </a:pPr>
+                      <a:r>
+                        <a:rPr lang="en-ID" sz="1100" b="0" i="0" u="none" strike="noStrike" dirty="0">
+                          <a:solidFill>
+                            <a:srgbClr val="000000"/>
+                          </a:solidFill>
+                          <a:effectLst/>
+                          <a:latin typeface="Segoe UI" panose="020B0502040204020203" pitchFamily="34" charset="0"/>
+                        </a:rPr>
+                        <a:t>                  7.7 </a:t>
+                      </a:r>
+                    </a:p>
+                  </a:txBody>
+                  <a:tcPr marL="9525" marR="9525" marT="9525" marB="0" anchor="b">
+                    <a:lnL>
+                      <a:noFill/>
+                    </a:lnL>
+                    <a:lnR>
+                      <a:noFill/>
+                    </a:lnR>
+                    <a:lnT>
+                      <a:noFill/>
+                    </a:lnT>
+                    <a:lnB>
+                      <a:noFill/>
+                    </a:lnB>
+                    <a:noFill/>
+                  </a:tcPr>
+                </a:tc>
+                <a:extLst>
+                  <a:ext uri="{0D108BD9-81ED-4DB2-BD59-A6C34878D82A}">
+                    <a16:rowId xmlns:a16="http://schemas.microsoft.com/office/drawing/2014/main" val="3606612821"/>
+                  </a:ext>
+                </a:extLst>
+              </a:tr>
+            </a:tbl>
+          </a:graphicData>
+        </a:graphic>
+      </p:graphicFrame>
+    </p:spTree>
+    <p:extLst>
+      <p:ext uri="{BB962C8B-B14F-4D97-AF65-F5344CB8AC3E}">
+        <p14:creationId xmlns:p14="http://schemas.microsoft.com/office/powerpoint/2010/main" val="651292926"/>
+      </p:ext>
+    </p:extLst>
+  </p:cSld>
+  <p:clrMapOvr>
+    <a:masterClrMapping/>
+  </p:clrMapOvr>
+</p:sld>
+</file>
+
+<file path=ppt/slides/slide5.xml><?xml version="1.0" encoding="utf-8"?>
+<p:sld xmlns:a="http://schemas.openxmlformats.org/drawingml/2006/main" xmlns:r="http://schemas.openxmlformats.org/officeDocument/2006/relationships" xmlns:p="http://schemas.openxmlformats.org/presentationml/2006/main">
+  <p:cSld>
+    <p:spTree>
+      <p:nvGrpSpPr>
+        <p:cNvPr id="1" name="">
+          <a:extLst>
+            <a:ext uri="{FF2B5EF4-FFF2-40B4-BE49-F238E27FC236}">
+              <a16:creationId xmlns:a16="http://schemas.microsoft.com/office/drawing/2014/main" id="{5EFD153C-0669-D2C9-7B0E-9AF5339D8797}"/>
+            </a:ext>
+          </a:extLst>
+        </p:cNvPr>
+        <p:cNvGrpSpPr/>
+        <p:nvPr/>
+      </p:nvGrpSpPr>
+      <p:grpSpPr>
+        <a:xfrm>
+          <a:off x="0" y="0"/>
+          <a:ext cx="0" cy="0"/>
+          <a:chOff x="0" y="0"/>
+          <a:chExt cx="0" cy="0"/>
+        </a:xfrm>
+      </p:grpSpPr>
+      <p:sp>
+        <p:nvSpPr>
+          <p:cNvPr id="30" name="TextBox 29">
+            <a:extLst>
+              <a:ext uri="{FF2B5EF4-FFF2-40B4-BE49-F238E27FC236}">
+                <a16:creationId xmlns:a16="http://schemas.microsoft.com/office/drawing/2014/main" id="{C50A4DD1-0B49-5C2A-DC90-3E48EB7D29F2}"/>
+              </a:ext>
+            </a:extLst>
+          </p:cNvPr>
+          <p:cNvSpPr txBox="1"/>
+          <p:nvPr/>
+        </p:nvSpPr>
+        <p:spPr>
+          <a:xfrm>
+            <a:off x="1319122" y="3025557"/>
+            <a:ext cx="973343" cy="261610"/>
+          </a:xfrm>
+          <a:prstGeom prst="rect">
+            <a:avLst/>
+          </a:prstGeom>
+          <a:noFill/>
+        </p:spPr>
+        <p:txBody>
+          <a:bodyPr wrap="none" rtlCol="0">
+            <a:spAutoFit/>
+          </a:bodyPr>
+          <a:lstStyle/>
+          <a:p>
+            <a:r>
+              <a:rPr lang="en-US" sz="1100" b="1" dirty="0">
+                <a:latin typeface="Segoe UI" panose="020B0502040204020203" pitchFamily="34" charset="0"/>
+                <a:cs typeface="Segoe UI" panose="020B0502040204020203" pitchFamily="34" charset="0"/>
+              </a:rPr>
+              <a:t>Zone Raster</a:t>
+            </a:r>
+          </a:p>
+        </p:txBody>
+      </p:sp>
+      <p:sp>
+        <p:nvSpPr>
+          <p:cNvPr id="32" name="TextBox 31">
+            <a:extLst>
+              <a:ext uri="{FF2B5EF4-FFF2-40B4-BE49-F238E27FC236}">
+                <a16:creationId xmlns:a16="http://schemas.microsoft.com/office/drawing/2014/main" id="{36DF1F65-36A7-BF9F-C62F-9C05FEDE500D}"/>
+              </a:ext>
+            </a:extLst>
+          </p:cNvPr>
+          <p:cNvSpPr txBox="1"/>
+          <p:nvPr/>
+        </p:nvSpPr>
+        <p:spPr>
+          <a:xfrm>
+            <a:off x="4697453" y="3025557"/>
+            <a:ext cx="1011815" cy="261610"/>
+          </a:xfrm>
+          <a:prstGeom prst="rect">
+            <a:avLst/>
+          </a:prstGeom>
+          <a:noFill/>
+        </p:spPr>
+        <p:txBody>
+          <a:bodyPr wrap="none" rtlCol="0">
+            <a:spAutoFit/>
+          </a:bodyPr>
+          <a:lstStyle/>
+          <a:p>
+            <a:r>
+              <a:rPr lang="en-US" sz="1100" b="1" dirty="0">
+                <a:latin typeface="Segoe UI" panose="020B0502040204020203" pitchFamily="34" charset="0"/>
+                <a:cs typeface="Segoe UI" panose="020B0502040204020203" pitchFamily="34" charset="0"/>
+              </a:rPr>
+              <a:t>Value Raster</a:t>
+            </a:r>
+          </a:p>
+        </p:txBody>
+      </p:sp>
+      <p:sp>
+        <p:nvSpPr>
+          <p:cNvPr id="34" name="TextBox 33">
+            <a:extLst>
+              <a:ext uri="{FF2B5EF4-FFF2-40B4-BE49-F238E27FC236}">
+                <a16:creationId xmlns:a16="http://schemas.microsoft.com/office/drawing/2014/main" id="{A507E745-71A8-9823-3E40-483D42A34236}"/>
+              </a:ext>
+            </a:extLst>
+          </p:cNvPr>
+          <p:cNvSpPr txBox="1"/>
+          <p:nvPr/>
+        </p:nvSpPr>
+        <p:spPr>
+          <a:xfrm>
+            <a:off x="1240988" y="6372315"/>
+            <a:ext cx="1114408" cy="261610"/>
+          </a:xfrm>
+          <a:prstGeom prst="rect">
+            <a:avLst/>
+          </a:prstGeom>
+          <a:noFill/>
+        </p:spPr>
+        <p:txBody>
+          <a:bodyPr wrap="none" rtlCol="0">
+            <a:spAutoFit/>
+          </a:bodyPr>
+          <a:lstStyle/>
+          <a:p>
+            <a:r>
+              <a:rPr lang="en-US" sz="1100" b="1" dirty="0">
+                <a:latin typeface="Segoe UI" panose="020B0502040204020203" pitchFamily="34" charset="0"/>
+                <a:cs typeface="Segoe UI" panose="020B0502040204020203" pitchFamily="34" charset="0"/>
+              </a:rPr>
+              <a:t>Output Raster</a:t>
+            </a:r>
+          </a:p>
+        </p:txBody>
+      </p:sp>
+      <p:sp>
+        <p:nvSpPr>
+          <p:cNvPr id="36" name="TextBox 35">
+            <a:extLst>
+              <a:ext uri="{FF2B5EF4-FFF2-40B4-BE49-F238E27FC236}">
+                <a16:creationId xmlns:a16="http://schemas.microsoft.com/office/drawing/2014/main" id="{FE4E6417-5FE1-9015-556F-3B07CBC41BEE}"/>
+              </a:ext>
+            </a:extLst>
+          </p:cNvPr>
+          <p:cNvSpPr txBox="1"/>
+          <p:nvPr/>
+        </p:nvSpPr>
+        <p:spPr>
+          <a:xfrm>
+            <a:off x="7545990" y="3026688"/>
+            <a:ext cx="2109873" cy="261610"/>
+          </a:xfrm>
+          <a:prstGeom prst="rect">
+            <a:avLst/>
+          </a:prstGeom>
+          <a:noFill/>
+        </p:spPr>
+        <p:txBody>
+          <a:bodyPr wrap="none" rtlCol="0">
+            <a:spAutoFit/>
+          </a:bodyPr>
+          <a:lstStyle/>
+          <a:p>
+            <a:r>
+              <a:rPr lang="en-US" sz="1100" b="1" dirty="0">
+                <a:latin typeface="Segoe UI" panose="020B0502040204020203" pitchFamily="34" charset="0"/>
+                <a:cs typeface="Segoe UI" panose="020B0502040204020203" pitchFamily="34" charset="0"/>
+              </a:rPr>
+              <a:t>Value Raster with Input Zone</a:t>
+            </a:r>
+          </a:p>
+        </p:txBody>
+      </p:sp>
+      <p:pic>
+        <p:nvPicPr>
+          <p:cNvPr id="40" name="Picture 39">
+            <a:extLst>
+              <a:ext uri="{FF2B5EF4-FFF2-40B4-BE49-F238E27FC236}">
+                <a16:creationId xmlns:a16="http://schemas.microsoft.com/office/drawing/2014/main" id="{98D6187B-7439-E11E-E9F5-4350F66CDFEA}"/>
+              </a:ext>
+            </a:extLst>
+          </p:cNvPr>
+          <p:cNvPicPr>
+            <a:picLocks noChangeAspect="1"/>
+          </p:cNvPicPr>
+          <p:nvPr/>
+        </p:nvPicPr>
+        <p:blipFill>
+          <a:blip r:embed="rId2"/>
+          <a:stretch>
+            <a:fillRect/>
+          </a:stretch>
+        </p:blipFill>
+        <p:spPr>
+          <a:xfrm>
+            <a:off x="3765087" y="230743"/>
+            <a:ext cx="2876550" cy="2775764"/>
+          </a:xfrm>
+          <a:prstGeom prst="rect">
+            <a:avLst/>
+          </a:prstGeom>
+        </p:spPr>
+      </p:pic>
+      <p:pic>
+        <p:nvPicPr>
+          <p:cNvPr id="42" name="Picture 41">
+            <a:extLst>
+              <a:ext uri="{FF2B5EF4-FFF2-40B4-BE49-F238E27FC236}">
+                <a16:creationId xmlns:a16="http://schemas.microsoft.com/office/drawing/2014/main" id="{F26F2DF2-79A7-0174-E8AB-70BF7ADDFBAD}"/>
+              </a:ext>
+            </a:extLst>
+          </p:cNvPr>
+          <p:cNvPicPr>
+            <a:picLocks noChangeAspect="1"/>
+          </p:cNvPicPr>
+          <p:nvPr/>
+        </p:nvPicPr>
+        <p:blipFill>
+          <a:blip r:embed="rId3"/>
+          <a:stretch>
+            <a:fillRect/>
+          </a:stretch>
+        </p:blipFill>
+        <p:spPr>
+          <a:xfrm>
+            <a:off x="7162653" y="225207"/>
+            <a:ext cx="2876550" cy="2781300"/>
+          </a:xfrm>
+          <a:prstGeom prst="rect">
+            <a:avLst/>
+          </a:prstGeom>
+        </p:spPr>
+      </p:pic>
+      <p:pic>
+        <p:nvPicPr>
+          <p:cNvPr id="44" name="Picture 43">
+            <a:extLst>
+              <a:ext uri="{FF2B5EF4-FFF2-40B4-BE49-F238E27FC236}">
+                <a16:creationId xmlns:a16="http://schemas.microsoft.com/office/drawing/2014/main" id="{D56BFFC7-FC52-5E96-F644-64D8DA5B7BA1}"/>
+              </a:ext>
+            </a:extLst>
+          </p:cNvPr>
+          <p:cNvPicPr>
+            <a:picLocks noChangeAspect="1"/>
+          </p:cNvPicPr>
+          <p:nvPr/>
+        </p:nvPicPr>
+        <p:blipFill>
+          <a:blip r:embed="rId4"/>
+          <a:stretch>
+            <a:fillRect/>
+          </a:stretch>
+        </p:blipFill>
+        <p:spPr>
+          <a:xfrm>
+            <a:off x="359918" y="3570834"/>
+            <a:ext cx="2876550" cy="2781300"/>
+          </a:xfrm>
+          <a:prstGeom prst="rect">
+            <a:avLst/>
+          </a:prstGeom>
+        </p:spPr>
+      </p:pic>
+      <p:sp>
+        <p:nvSpPr>
+          <p:cNvPr id="45" name="TextBox 44">
+            <a:extLst>
+              <a:ext uri="{FF2B5EF4-FFF2-40B4-BE49-F238E27FC236}">
+                <a16:creationId xmlns:a16="http://schemas.microsoft.com/office/drawing/2014/main" id="{D934C0FE-C555-D3A6-62BF-ED6977BA987E}"/>
+              </a:ext>
+            </a:extLst>
+          </p:cNvPr>
+          <p:cNvSpPr txBox="1"/>
+          <p:nvPr/>
+        </p:nvSpPr>
+        <p:spPr>
+          <a:xfrm>
+            <a:off x="6951179" y="3501791"/>
+            <a:ext cx="1539204" cy="1107996"/>
+          </a:xfrm>
+          <a:prstGeom prst="rect">
+            <a:avLst/>
+          </a:prstGeom>
+          <a:noFill/>
+        </p:spPr>
+        <p:txBody>
+          <a:bodyPr wrap="none" rtlCol="0">
+            <a:spAutoFit/>
+          </a:bodyPr>
+          <a:lstStyle/>
+          <a:p>
+            <a:r>
+              <a:rPr lang="en-US" sz="1100" b="1" dirty="0">
+                <a:latin typeface="Segoe UI" panose="020B0502040204020203" pitchFamily="34" charset="0"/>
+                <a:cs typeface="Segoe UI" panose="020B0502040204020203" pitchFamily="34" charset="0"/>
+              </a:rPr>
+              <a:t>Remark Value</a:t>
+            </a:r>
+          </a:p>
+          <a:p>
+            <a:r>
+              <a:rPr lang="en-US" sz="1100" dirty="0">
+                <a:latin typeface="Segoe UI" panose="020B0502040204020203" pitchFamily="34" charset="0"/>
+                <a:cs typeface="Segoe UI" panose="020B0502040204020203" pitchFamily="34" charset="0"/>
+              </a:rPr>
+              <a:t>1- Natural Vegetation</a:t>
+            </a:r>
+          </a:p>
+          <a:p>
+            <a:r>
+              <a:rPr lang="en-US" sz="1100" dirty="0">
+                <a:latin typeface="Segoe UI" panose="020B0502040204020203" pitchFamily="34" charset="0"/>
+                <a:cs typeface="Segoe UI" panose="020B0502040204020203" pitchFamily="34" charset="0"/>
+              </a:rPr>
+              <a:t>2 - Water</a:t>
+            </a:r>
+          </a:p>
+          <a:p>
+            <a:r>
+              <a:rPr lang="en-US" sz="1100" dirty="0">
+                <a:latin typeface="Segoe UI" panose="020B0502040204020203" pitchFamily="34" charset="0"/>
+                <a:cs typeface="Segoe UI" panose="020B0502040204020203" pitchFamily="34" charset="0"/>
+              </a:rPr>
+              <a:t>3 - Settlement</a:t>
+            </a:r>
+          </a:p>
+          <a:p>
+            <a:r>
+              <a:rPr lang="en-US" sz="1100" dirty="0">
+                <a:latin typeface="Segoe UI" panose="020B0502040204020203" pitchFamily="34" charset="0"/>
+                <a:cs typeface="Segoe UI" panose="020B0502040204020203" pitchFamily="34" charset="0"/>
+              </a:rPr>
+              <a:t>4 - Bare land</a:t>
+            </a:r>
+          </a:p>
+          <a:p>
+            <a:r>
+              <a:rPr lang="en-US" sz="1100" dirty="0">
+                <a:latin typeface="Segoe UI" panose="020B0502040204020203" pitchFamily="34" charset="0"/>
+                <a:cs typeface="Segoe UI" panose="020B0502040204020203" pitchFamily="34" charset="0"/>
+              </a:rPr>
+              <a:t>5 - Plantation</a:t>
+            </a:r>
+          </a:p>
+        </p:txBody>
+      </p:sp>
+      <p:pic>
+        <p:nvPicPr>
+          <p:cNvPr id="47" name="Picture 46">
+            <a:extLst>
+              <a:ext uri="{FF2B5EF4-FFF2-40B4-BE49-F238E27FC236}">
+                <a16:creationId xmlns:a16="http://schemas.microsoft.com/office/drawing/2014/main" id="{FEDCD038-0192-09AA-A66B-72C88936D0A2}"/>
+              </a:ext>
+            </a:extLst>
+          </p:cNvPr>
+          <p:cNvPicPr>
+            <a:picLocks noChangeAspect="1"/>
+          </p:cNvPicPr>
+          <p:nvPr/>
+        </p:nvPicPr>
+        <p:blipFill>
+          <a:blip r:embed="rId5"/>
+          <a:stretch>
+            <a:fillRect/>
+          </a:stretch>
+        </p:blipFill>
+        <p:spPr>
+          <a:xfrm>
+            <a:off x="367521" y="230743"/>
+            <a:ext cx="2876550" cy="2781300"/>
+          </a:xfrm>
+          <a:prstGeom prst="rect">
+            <a:avLst/>
+          </a:prstGeom>
+        </p:spPr>
+      </p:pic>
+      <p:pic>
+        <p:nvPicPr>
+          <p:cNvPr id="3" name="Picture 2">
+            <a:extLst>
+              <a:ext uri="{FF2B5EF4-FFF2-40B4-BE49-F238E27FC236}">
+                <a16:creationId xmlns:a16="http://schemas.microsoft.com/office/drawing/2014/main" id="{4F34CA61-22B0-71F3-D0BD-F0A6863A6745}"/>
+              </a:ext>
+            </a:extLst>
+          </p:cNvPr>
+          <p:cNvPicPr>
+            <a:picLocks noChangeAspect="1"/>
+          </p:cNvPicPr>
+          <p:nvPr/>
+        </p:nvPicPr>
+        <p:blipFill>
+          <a:blip r:embed="rId6"/>
+          <a:stretch>
+            <a:fillRect/>
+          </a:stretch>
+        </p:blipFill>
+        <p:spPr>
+          <a:xfrm>
+            <a:off x="3765087" y="3570834"/>
+            <a:ext cx="2876550" cy="2791538"/>
+          </a:xfrm>
+          <a:prstGeom prst="rect">
+            <a:avLst/>
+          </a:prstGeom>
+        </p:spPr>
+      </p:pic>
+      <p:sp>
+        <p:nvSpPr>
+          <p:cNvPr id="7" name="TextBox 6">
+            <a:extLst>
+              <a:ext uri="{FF2B5EF4-FFF2-40B4-BE49-F238E27FC236}">
+                <a16:creationId xmlns:a16="http://schemas.microsoft.com/office/drawing/2014/main" id="{8BDCBA8B-36E0-9604-4FE6-C45BD3FE9A80}"/>
+              </a:ext>
+            </a:extLst>
+          </p:cNvPr>
+          <p:cNvSpPr txBox="1"/>
+          <p:nvPr/>
+        </p:nvSpPr>
+        <p:spPr>
+          <a:xfrm>
+            <a:off x="4089112" y="6384429"/>
+            <a:ext cx="2228495" cy="261610"/>
+          </a:xfrm>
+          <a:prstGeom prst="rect">
+            <a:avLst/>
+          </a:prstGeom>
+          <a:noFill/>
+        </p:spPr>
+        <p:txBody>
+          <a:bodyPr wrap="none" rtlCol="0">
+            <a:spAutoFit/>
+          </a:bodyPr>
+          <a:lstStyle/>
+          <a:p>
+            <a:r>
+              <a:rPr lang="en-US" sz="1100" b="1" dirty="0">
+                <a:latin typeface="Segoe UI" panose="020B0502040204020203" pitchFamily="34" charset="0"/>
+                <a:cs typeface="Segoe UI" panose="020B0502040204020203" pitchFamily="34" charset="0"/>
+              </a:rPr>
+              <a:t>Output Raster (Majority Value)</a:t>
+            </a:r>
+          </a:p>
+        </p:txBody>
+      </p:sp>
+      <p:graphicFrame>
+        <p:nvGraphicFramePr>
+          <p:cNvPr id="14" name="Table 13">
+            <a:extLst>
+              <a:ext uri="{FF2B5EF4-FFF2-40B4-BE49-F238E27FC236}">
+                <a16:creationId xmlns:a16="http://schemas.microsoft.com/office/drawing/2014/main" id="{0AE087BE-330F-6E92-54F7-83B955892795}"/>
+              </a:ext>
+            </a:extLst>
+          </p:cNvPr>
+          <p:cNvGraphicFramePr>
+            <a:graphicFrameLocks noGrp="1"/>
+          </p:cNvGraphicFramePr>
+          <p:nvPr>
+            <p:extLst>
+              <p:ext uri="{D42A27DB-BD31-4B8C-83A1-F6EECF244321}">
+                <p14:modId xmlns:p14="http://schemas.microsoft.com/office/powerpoint/2010/main" val="3758902941"/>
+              </p:ext>
+            </p:extLst>
+          </p:nvPr>
+        </p:nvGraphicFramePr>
+        <p:xfrm>
+          <a:off x="7016453" y="4915614"/>
+          <a:ext cx="2717800" cy="1466850"/>
+        </p:xfrm>
+        <a:graphic>
+          <a:graphicData uri="http://schemas.openxmlformats.org/drawingml/2006/table">
+            <a:tbl>
+              <a:tblPr/>
+              <a:tblGrid>
+                <a:gridCol w="938703">
+                  <a:extLst>
+                    <a:ext uri="{9D8B030D-6E8A-4147-A177-3AD203B41FA5}">
+                      <a16:colId xmlns:a16="http://schemas.microsoft.com/office/drawing/2014/main" val="1877058027"/>
+                    </a:ext>
+                  </a:extLst>
+                </a:gridCol>
+                <a:gridCol w="482037">
+                  <a:extLst>
+                    <a:ext uri="{9D8B030D-6E8A-4147-A177-3AD203B41FA5}">
+                      <a16:colId xmlns:a16="http://schemas.microsoft.com/office/drawing/2014/main" val="253210415"/>
+                    </a:ext>
+                  </a:extLst>
+                </a:gridCol>
+                <a:gridCol w="599375">
+                  <a:extLst>
+                    <a:ext uri="{9D8B030D-6E8A-4147-A177-3AD203B41FA5}">
+                      <a16:colId xmlns:a16="http://schemas.microsoft.com/office/drawing/2014/main" val="3435440439"/>
+                    </a:ext>
+                  </a:extLst>
+                </a:gridCol>
+                <a:gridCol w="697685">
+                  <a:extLst>
+                    <a:ext uri="{9D8B030D-6E8A-4147-A177-3AD203B41FA5}">
+                      <a16:colId xmlns:a16="http://schemas.microsoft.com/office/drawing/2014/main" val="1727699070"/>
+                    </a:ext>
+                  </a:extLst>
+                </a:gridCol>
+              </a:tblGrid>
+              <a:tr h="209550">
+                <a:tc>
+                  <a:txBody>
+                    <a:bodyPr/>
+                    <a:lstStyle/>
+                    <a:p>
+                      <a:pPr algn="l" fontAlgn="b">
+                        <a:buNone/>
+                      </a:pPr>
+                      <a:r>
+                        <a:rPr lang="en-ID" sz="1100" b="1" i="0" u="none" strike="noStrike">
+                          <a:solidFill>
+                            <a:srgbClr val="FFFFFF"/>
+                          </a:solidFill>
+                          <a:effectLst/>
+                          <a:latin typeface="Segoe UI" panose="020B0502040204020203" pitchFamily="34" charset="0"/>
+                        </a:rPr>
+                        <a:t>Zone</a:t>
+                      </a:r>
+                    </a:p>
+                  </a:txBody>
+                  <a:tcPr marL="9525" marR="9525" marT="9525" marB="0" anchor="b">
+                    <a:lnL w="6350" cap="flat" cmpd="sng" algn="ctr">
+                      <a:solidFill>
+                        <a:srgbClr val="000000"/>
+                      </a:solidFill>
+                      <a:prstDash val="solid"/>
+                      <a:round/>
+                      <a:headEnd type="none" w="med" len="med"/>
+                      <a:tailEnd type="none" w="med" len="med"/>
+                    </a:lnL>
+                    <a:lnR>
+                      <a:noFill/>
+                    </a:lnR>
+                    <a:lnT w="6350" cap="flat" cmpd="sng" algn="ctr">
+                      <a:solidFill>
+                        <a:srgbClr val="000000"/>
+                      </a:solidFill>
+                      <a:prstDash val="solid"/>
+                      <a:round/>
+                      <a:headEnd type="none" w="med" len="med"/>
+                      <a:tailEnd type="none" w="med" len="med"/>
+                    </a:lnT>
+                    <a:lnB w="6350" cap="flat" cmpd="sng" algn="ctr">
+                      <a:solidFill>
+                        <a:srgbClr val="000000"/>
+                      </a:solidFill>
+                      <a:prstDash val="solid"/>
+                      <a:round/>
+                      <a:headEnd type="none" w="med" len="med"/>
+                      <a:tailEnd type="none" w="med" len="med"/>
+                    </a:lnB>
+                    <a:solidFill>
+                      <a:srgbClr val="000000"/>
+                    </a:solidFill>
+                  </a:tcPr>
+                </a:tc>
+                <a:tc>
+                  <a:txBody>
+                    <a:bodyPr/>
+                    <a:lstStyle/>
+                    <a:p>
+                      <a:pPr algn="ctr" fontAlgn="b">
+                        <a:buNone/>
+                      </a:pPr>
+                      <a:r>
+                        <a:rPr lang="en-ID" sz="1100" b="1" i="0" u="none" strike="noStrike">
+                          <a:solidFill>
+                            <a:srgbClr val="FFFFFF"/>
+                          </a:solidFill>
+                          <a:effectLst/>
+                          <a:latin typeface="Segoe UI" panose="020B0502040204020203" pitchFamily="34" charset="0"/>
+                        </a:rPr>
+                        <a:t>A</a:t>
+                      </a:r>
+                    </a:p>
+                  </a:txBody>
+                  <a:tcPr marL="9525" marR="9525" marT="9525" marB="0" anchor="b">
+                    <a:lnL>
+                      <a:noFill/>
+                    </a:lnL>
+                    <a:lnR>
+                      <a:noFill/>
+                    </a:lnR>
+                    <a:lnT w="6350" cap="flat" cmpd="sng" algn="ctr">
+                      <a:solidFill>
+                        <a:srgbClr val="000000"/>
+                      </a:solidFill>
+                      <a:prstDash val="solid"/>
+                      <a:round/>
+                      <a:headEnd type="none" w="med" len="med"/>
+                      <a:tailEnd type="none" w="med" len="med"/>
+                    </a:lnT>
+                    <a:lnB w="6350" cap="flat" cmpd="sng" algn="ctr">
+                      <a:solidFill>
+                        <a:srgbClr val="000000"/>
+                      </a:solidFill>
+                      <a:prstDash val="solid"/>
+                      <a:round/>
+                      <a:headEnd type="none" w="med" len="med"/>
+                      <a:tailEnd type="none" w="med" len="med"/>
+                    </a:lnB>
+                    <a:solidFill>
+                      <a:srgbClr val="000000"/>
+                    </a:solidFill>
+                  </a:tcPr>
+                </a:tc>
+                <a:tc>
+                  <a:txBody>
+                    <a:bodyPr/>
+                    <a:lstStyle/>
+                    <a:p>
+                      <a:pPr algn="ctr" fontAlgn="b">
+                        <a:buNone/>
+                      </a:pPr>
+                      <a:r>
+                        <a:rPr lang="en-ID" sz="1100" b="1" i="0" u="none" strike="noStrike" dirty="0">
+                          <a:solidFill>
+                            <a:srgbClr val="FFFFFF"/>
+                          </a:solidFill>
+                          <a:effectLst/>
+                          <a:latin typeface="Segoe UI" panose="020B0502040204020203" pitchFamily="34" charset="0"/>
+                        </a:rPr>
+                        <a:t>B</a:t>
+                      </a:r>
+                    </a:p>
+                  </a:txBody>
+                  <a:tcPr marL="9525" marR="9525" marT="9525" marB="0" anchor="b">
+                    <a:lnL>
+                      <a:noFill/>
+                    </a:lnL>
+                    <a:lnR>
+                      <a:noFill/>
+                    </a:lnR>
+                    <a:lnT w="6350" cap="flat" cmpd="sng" algn="ctr">
+                      <a:solidFill>
+                        <a:srgbClr val="000000"/>
+                      </a:solidFill>
+                      <a:prstDash val="solid"/>
+                      <a:round/>
+                      <a:headEnd type="none" w="med" len="med"/>
+                      <a:tailEnd type="none" w="med" len="med"/>
+                    </a:lnT>
+                    <a:lnB w="6350" cap="flat" cmpd="sng" algn="ctr">
+                      <a:solidFill>
+                        <a:srgbClr val="000000"/>
+                      </a:solidFill>
+                      <a:prstDash val="solid"/>
+                      <a:round/>
+                      <a:headEnd type="none" w="med" len="med"/>
+                      <a:tailEnd type="none" w="med" len="med"/>
+                    </a:lnB>
+                    <a:solidFill>
+                      <a:srgbClr val="000000"/>
+                    </a:solidFill>
+                  </a:tcPr>
+                </a:tc>
+                <a:tc>
+                  <a:txBody>
+                    <a:bodyPr/>
+                    <a:lstStyle/>
+                    <a:p>
+                      <a:pPr algn="ctr" fontAlgn="b">
+                        <a:buNone/>
+                      </a:pPr>
+                      <a:r>
+                        <a:rPr lang="en-ID" sz="1100" b="1" i="0" u="none" strike="noStrike">
+                          <a:solidFill>
+                            <a:srgbClr val="FFFFFF"/>
+                          </a:solidFill>
+                          <a:effectLst/>
+                          <a:latin typeface="Segoe UI" panose="020B0502040204020203" pitchFamily="34" charset="0"/>
+                        </a:rPr>
+                        <a:t>C</a:t>
+                      </a:r>
+                    </a:p>
+                  </a:txBody>
+                  <a:tcPr marL="9525" marR="9525" marT="9525" marB="0" anchor="b">
+                    <a:lnL>
+                      <a:noFill/>
+                    </a:lnL>
+                    <a:lnR w="6350" cap="flat" cmpd="sng" algn="ctr">
+                      <a:solidFill>
+                        <a:srgbClr val="000000"/>
+                      </a:solidFill>
+                      <a:prstDash val="solid"/>
+                      <a:round/>
+                      <a:headEnd type="none" w="med" len="med"/>
+                      <a:tailEnd type="none" w="med" len="med"/>
+                    </a:lnR>
+                    <a:lnT w="6350" cap="flat" cmpd="sng" algn="ctr">
+                      <a:solidFill>
+                        <a:srgbClr val="000000"/>
+                      </a:solidFill>
+                      <a:prstDash val="solid"/>
+                      <a:round/>
+                      <a:headEnd type="none" w="med" len="med"/>
+                      <a:tailEnd type="none" w="med" len="med"/>
+                    </a:lnT>
+                    <a:lnB w="6350" cap="flat" cmpd="sng" algn="ctr">
+                      <a:solidFill>
+                        <a:srgbClr val="000000"/>
+                      </a:solidFill>
+                      <a:prstDash val="solid"/>
+                      <a:round/>
+                      <a:headEnd type="none" w="med" len="med"/>
+                      <a:tailEnd type="none" w="med" len="med"/>
+                    </a:lnB>
+                    <a:solidFill>
+                      <a:srgbClr val="000000"/>
+                    </a:solidFill>
+                  </a:tcPr>
+                </a:tc>
+                <a:extLst>
+                  <a:ext uri="{0D108BD9-81ED-4DB2-BD59-A6C34878D82A}">
+                    <a16:rowId xmlns:a16="http://schemas.microsoft.com/office/drawing/2014/main" val="2919585388"/>
+                  </a:ext>
+                </a:extLst>
+              </a:tr>
+              <a:tr h="209550">
+                <a:tc>
+                  <a:txBody>
+                    <a:bodyPr/>
+                    <a:lstStyle/>
+                    <a:p>
+                      <a:pPr algn="l" fontAlgn="b">
+                        <a:buNone/>
+                      </a:pPr>
+                      <a:r>
+                        <a:rPr lang="en-ID" sz="1100" b="1" i="0" u="none" strike="noStrike">
+                          <a:solidFill>
+                            <a:srgbClr val="000000"/>
+                          </a:solidFill>
+                          <a:effectLst/>
+                          <a:latin typeface="Segoe UI" panose="020B0502040204020203" pitchFamily="34" charset="0"/>
+                        </a:rPr>
+                        <a:t>Count</a:t>
+                      </a:r>
+                    </a:p>
+                  </a:txBody>
+                  <a:tcPr marL="9525" marR="9525" marT="9525" marB="0" anchor="b">
+                    <a:lnL w="6350" cap="flat" cmpd="sng" algn="ctr">
+                      <a:solidFill>
+                        <a:srgbClr val="000000"/>
+                      </a:solidFill>
+                      <a:prstDash val="solid"/>
+                      <a:round/>
+                      <a:headEnd type="none" w="med" len="med"/>
+                      <a:tailEnd type="none" w="med" len="med"/>
+                    </a:lnL>
+                    <a:lnR>
+                      <a:noFill/>
+                    </a:lnR>
+                    <a:lnT w="6350" cap="flat" cmpd="sng" algn="ctr">
+                      <a:solidFill>
+                        <a:srgbClr val="000000"/>
+                      </a:solidFill>
+                      <a:prstDash val="solid"/>
+                      <a:round/>
+                      <a:headEnd type="none" w="med" len="med"/>
+                      <a:tailEnd type="none" w="med" len="med"/>
+                    </a:lnT>
+                    <a:lnB w="6350" cap="flat" cmpd="sng" algn="ctr">
+                      <a:solidFill>
+                        <a:srgbClr val="000000"/>
+                      </a:solidFill>
+                      <a:prstDash val="solid"/>
+                      <a:round/>
+                      <a:headEnd type="none" w="med" len="med"/>
+                      <a:tailEnd type="none" w="med" len="med"/>
+                    </a:lnB>
+                    <a:noFill/>
+                  </a:tcPr>
+                </a:tc>
+                <a:tc>
+                  <a:txBody>
+                    <a:bodyPr/>
+                    <a:lstStyle/>
+                    <a:p>
+                      <a:pPr algn="ctr" fontAlgn="b">
+                        <a:buNone/>
+                      </a:pPr>
+                      <a:r>
+                        <a:rPr lang="en-ID" sz="1100" b="0" i="0" u="none" strike="noStrike">
+                          <a:solidFill>
+                            <a:srgbClr val="000000"/>
+                          </a:solidFill>
+                          <a:effectLst/>
+                          <a:latin typeface="Segoe UI" panose="020B0502040204020203" pitchFamily="34" charset="0"/>
+                        </a:rPr>
+                        <a:t>6</a:t>
+                      </a:r>
+                    </a:p>
+                  </a:txBody>
+                  <a:tcPr marL="9525" marR="9525" marT="9525" marB="0" anchor="b">
+                    <a:lnL>
+                      <a:noFill/>
+                    </a:lnL>
+                    <a:lnR>
+                      <a:noFill/>
+                    </a:lnR>
+                    <a:lnT w="6350" cap="flat" cmpd="sng" algn="ctr">
+                      <a:solidFill>
+                        <a:srgbClr val="000000"/>
+                      </a:solidFill>
+                      <a:prstDash val="solid"/>
+                      <a:round/>
+                      <a:headEnd type="none" w="med" len="med"/>
+                      <a:tailEnd type="none" w="med" len="med"/>
+                    </a:lnT>
+                    <a:lnB w="6350" cap="flat" cmpd="sng" algn="ctr">
+                      <a:solidFill>
+                        <a:srgbClr val="000000"/>
+                      </a:solidFill>
+                      <a:prstDash val="solid"/>
+                      <a:round/>
+                      <a:headEnd type="none" w="med" len="med"/>
+                      <a:tailEnd type="none" w="med" len="med"/>
+                    </a:lnB>
+                    <a:noFill/>
+                  </a:tcPr>
+                </a:tc>
+                <a:tc>
+                  <a:txBody>
+                    <a:bodyPr/>
+                    <a:lstStyle/>
+                    <a:p>
+                      <a:pPr algn="ctr" fontAlgn="b">
+                        <a:buNone/>
+                      </a:pPr>
+                      <a:r>
+                        <a:rPr lang="en-ID" sz="1100" b="0" i="0" u="none" strike="noStrike">
+                          <a:solidFill>
+                            <a:srgbClr val="000000"/>
+                          </a:solidFill>
+                          <a:effectLst/>
+                          <a:latin typeface="Segoe UI" panose="020B0502040204020203" pitchFamily="34" charset="0"/>
+                        </a:rPr>
+                        <a:t>8</a:t>
+                      </a:r>
+                    </a:p>
+                  </a:txBody>
+                  <a:tcPr marL="9525" marR="9525" marT="9525" marB="0" anchor="b">
+                    <a:lnL>
+                      <a:noFill/>
+                    </a:lnL>
+                    <a:lnR>
+                      <a:noFill/>
+                    </a:lnR>
+                    <a:lnT w="6350" cap="flat" cmpd="sng" algn="ctr">
+                      <a:solidFill>
+                        <a:srgbClr val="000000"/>
+                      </a:solidFill>
+                      <a:prstDash val="solid"/>
+                      <a:round/>
+                      <a:headEnd type="none" w="med" len="med"/>
+                      <a:tailEnd type="none" w="med" len="med"/>
+                    </a:lnT>
+                    <a:lnB w="6350" cap="flat" cmpd="sng" algn="ctr">
+                      <a:solidFill>
+                        <a:srgbClr val="000000"/>
+                      </a:solidFill>
+                      <a:prstDash val="solid"/>
+                      <a:round/>
+                      <a:headEnd type="none" w="med" len="med"/>
+                      <a:tailEnd type="none" w="med" len="med"/>
+                    </a:lnB>
+                    <a:noFill/>
+                  </a:tcPr>
+                </a:tc>
+                <a:tc>
+                  <a:txBody>
+                    <a:bodyPr/>
+                    <a:lstStyle/>
+                    <a:p>
+                      <a:pPr algn="ctr" fontAlgn="b">
+                        <a:buNone/>
+                      </a:pPr>
+                      <a:r>
+                        <a:rPr lang="en-ID" sz="1100" b="0" i="0" u="none" strike="noStrike">
+                          <a:solidFill>
+                            <a:srgbClr val="000000"/>
+                          </a:solidFill>
+                          <a:effectLst/>
+                          <a:latin typeface="Segoe UI" panose="020B0502040204020203" pitchFamily="34" charset="0"/>
+                        </a:rPr>
+                        <a:t>13</a:t>
+                      </a:r>
+                    </a:p>
+                  </a:txBody>
+                  <a:tcPr marL="9525" marR="9525" marT="9525" marB="0" anchor="b">
+                    <a:lnL>
+                      <a:noFill/>
+                    </a:lnL>
+                    <a:lnR w="6350" cap="flat" cmpd="sng" algn="ctr">
+                      <a:solidFill>
+                        <a:srgbClr val="000000"/>
+                      </a:solidFill>
+                      <a:prstDash val="solid"/>
+                      <a:round/>
+                      <a:headEnd type="none" w="med" len="med"/>
+                      <a:tailEnd type="none" w="med" len="med"/>
+                    </a:lnR>
+                    <a:lnT w="6350" cap="flat" cmpd="sng" algn="ctr">
+                      <a:solidFill>
+                        <a:srgbClr val="000000"/>
+                      </a:solidFill>
+                      <a:prstDash val="solid"/>
+                      <a:round/>
+                      <a:headEnd type="none" w="med" len="med"/>
+                      <a:tailEnd type="none" w="med" len="med"/>
+                    </a:lnT>
+                    <a:lnB w="6350" cap="flat" cmpd="sng" algn="ctr">
+                      <a:solidFill>
+                        <a:srgbClr val="000000"/>
+                      </a:solidFill>
+                      <a:prstDash val="solid"/>
+                      <a:round/>
+                      <a:headEnd type="none" w="med" len="med"/>
+                      <a:tailEnd type="none" w="med" len="med"/>
+                    </a:lnB>
+                    <a:noFill/>
+                  </a:tcPr>
+                </a:tc>
+                <a:extLst>
+                  <a:ext uri="{0D108BD9-81ED-4DB2-BD59-A6C34878D82A}">
+                    <a16:rowId xmlns:a16="http://schemas.microsoft.com/office/drawing/2014/main" val="476082356"/>
+                  </a:ext>
+                </a:extLst>
+              </a:tr>
+              <a:tr h="209550">
+                <a:tc>
+                  <a:txBody>
+                    <a:bodyPr/>
+                    <a:lstStyle/>
+                    <a:p>
+                      <a:pPr algn="l" fontAlgn="b">
+                        <a:buNone/>
+                      </a:pPr>
+                      <a:r>
+                        <a:rPr lang="en-ID" sz="1100" b="1" i="0" u="none" strike="noStrike">
+                          <a:solidFill>
+                            <a:srgbClr val="000000"/>
+                          </a:solidFill>
+                          <a:effectLst/>
+                          <a:latin typeface="Segoe UI" panose="020B0502040204020203" pitchFamily="34" charset="0"/>
+                        </a:rPr>
+                        <a:t>Variety</a:t>
+                      </a:r>
+                    </a:p>
+                  </a:txBody>
+                  <a:tcPr marL="9525" marR="9525" marT="9525" marB="0" anchor="b">
+                    <a:lnL w="6350" cap="flat" cmpd="sng" algn="ctr">
+                      <a:solidFill>
+                        <a:srgbClr val="000000"/>
+                      </a:solidFill>
+                      <a:prstDash val="solid"/>
+                      <a:round/>
+                      <a:headEnd type="none" w="med" len="med"/>
+                      <a:tailEnd type="none" w="med" len="med"/>
+                    </a:lnL>
+                    <a:lnR>
+                      <a:noFill/>
+                    </a:lnR>
+                    <a:lnT w="6350" cap="flat" cmpd="sng" algn="ctr">
+                      <a:solidFill>
+                        <a:srgbClr val="000000"/>
+                      </a:solidFill>
+                      <a:prstDash val="solid"/>
+                      <a:round/>
+                      <a:headEnd type="none" w="med" len="med"/>
+                      <a:tailEnd type="none" w="med" len="med"/>
+                    </a:lnT>
+                    <a:lnB w="6350" cap="flat" cmpd="sng" algn="ctr">
+                      <a:solidFill>
+                        <a:srgbClr val="000000"/>
+                      </a:solidFill>
+                      <a:prstDash val="solid"/>
+                      <a:round/>
+                      <a:headEnd type="none" w="med" len="med"/>
+                      <a:tailEnd type="none" w="med" len="med"/>
+                    </a:lnB>
+                    <a:noFill/>
+                  </a:tcPr>
+                </a:tc>
+                <a:tc>
+                  <a:txBody>
+                    <a:bodyPr/>
+                    <a:lstStyle/>
+                    <a:p>
+                      <a:pPr algn="ctr" fontAlgn="b">
+                        <a:buNone/>
+                      </a:pPr>
+                      <a:r>
+                        <a:rPr lang="en-ID" sz="1100" b="0" i="0" u="none" strike="noStrike">
+                          <a:solidFill>
+                            <a:srgbClr val="000000"/>
+                          </a:solidFill>
+                          <a:effectLst/>
+                          <a:latin typeface="Segoe UI" panose="020B0502040204020203" pitchFamily="34" charset="0"/>
+                        </a:rPr>
+                        <a:t>2</a:t>
+                      </a:r>
+                    </a:p>
+                  </a:txBody>
+                  <a:tcPr marL="9525" marR="9525" marT="9525" marB="0" anchor="b">
+                    <a:lnL>
+                      <a:noFill/>
+                    </a:lnL>
+                    <a:lnR>
+                      <a:noFill/>
+                    </a:lnR>
+                    <a:lnT w="6350" cap="flat" cmpd="sng" algn="ctr">
+                      <a:solidFill>
+                        <a:srgbClr val="000000"/>
+                      </a:solidFill>
+                      <a:prstDash val="solid"/>
+                      <a:round/>
+                      <a:headEnd type="none" w="med" len="med"/>
+                      <a:tailEnd type="none" w="med" len="med"/>
+                    </a:lnT>
+                    <a:lnB w="6350" cap="flat" cmpd="sng" algn="ctr">
+                      <a:solidFill>
+                        <a:srgbClr val="000000"/>
+                      </a:solidFill>
+                      <a:prstDash val="solid"/>
+                      <a:round/>
+                      <a:headEnd type="none" w="med" len="med"/>
+                      <a:tailEnd type="none" w="med" len="med"/>
+                    </a:lnB>
+                    <a:noFill/>
+                  </a:tcPr>
+                </a:tc>
+                <a:tc>
+                  <a:txBody>
+                    <a:bodyPr/>
+                    <a:lstStyle/>
+                    <a:p>
+                      <a:pPr algn="ctr" fontAlgn="b">
+                        <a:buNone/>
+                      </a:pPr>
+                      <a:r>
+                        <a:rPr lang="en-ID" sz="1100" b="0" i="0" u="none" strike="noStrike">
+                          <a:solidFill>
+                            <a:srgbClr val="000000"/>
+                          </a:solidFill>
+                          <a:effectLst/>
+                          <a:latin typeface="Segoe UI" panose="020B0502040204020203" pitchFamily="34" charset="0"/>
+                        </a:rPr>
+                        <a:t>2</a:t>
+                      </a:r>
+                    </a:p>
+                  </a:txBody>
+                  <a:tcPr marL="9525" marR="9525" marT="9525" marB="0" anchor="b">
+                    <a:lnL>
+                      <a:noFill/>
+                    </a:lnL>
+                    <a:lnR>
+                      <a:noFill/>
+                    </a:lnR>
+                    <a:lnT w="6350" cap="flat" cmpd="sng" algn="ctr">
+                      <a:solidFill>
+                        <a:srgbClr val="000000"/>
+                      </a:solidFill>
+                      <a:prstDash val="solid"/>
+                      <a:round/>
+                      <a:headEnd type="none" w="med" len="med"/>
+                      <a:tailEnd type="none" w="med" len="med"/>
+                    </a:lnT>
+                    <a:lnB w="6350" cap="flat" cmpd="sng" algn="ctr">
+                      <a:solidFill>
+                        <a:srgbClr val="000000"/>
+                      </a:solidFill>
+                      <a:prstDash val="solid"/>
+                      <a:round/>
+                      <a:headEnd type="none" w="med" len="med"/>
+                      <a:tailEnd type="none" w="med" len="med"/>
+                    </a:lnB>
+                    <a:noFill/>
+                  </a:tcPr>
+                </a:tc>
+                <a:tc>
+                  <a:txBody>
+                    <a:bodyPr/>
+                    <a:lstStyle/>
+                    <a:p>
+                      <a:pPr algn="ctr" fontAlgn="b">
+                        <a:buNone/>
+                      </a:pPr>
+                      <a:r>
+                        <a:rPr lang="en-ID" sz="1100" b="0" i="0" u="none" strike="noStrike">
+                          <a:solidFill>
+                            <a:srgbClr val="000000"/>
+                          </a:solidFill>
+                          <a:effectLst/>
+                          <a:latin typeface="Segoe UI" panose="020B0502040204020203" pitchFamily="34" charset="0"/>
+                        </a:rPr>
+                        <a:t>3</a:t>
+                      </a:r>
+                    </a:p>
+                  </a:txBody>
+                  <a:tcPr marL="9525" marR="9525" marT="9525" marB="0" anchor="b">
+                    <a:lnL>
+                      <a:noFill/>
+                    </a:lnL>
+                    <a:lnR w="6350" cap="flat" cmpd="sng" algn="ctr">
+                      <a:solidFill>
+                        <a:srgbClr val="000000"/>
+                      </a:solidFill>
+                      <a:prstDash val="solid"/>
+                      <a:round/>
+                      <a:headEnd type="none" w="med" len="med"/>
+                      <a:tailEnd type="none" w="med" len="med"/>
+                    </a:lnR>
+                    <a:lnT w="6350" cap="flat" cmpd="sng" algn="ctr">
+                      <a:solidFill>
+                        <a:srgbClr val="000000"/>
+                      </a:solidFill>
+                      <a:prstDash val="solid"/>
+                      <a:round/>
+                      <a:headEnd type="none" w="med" len="med"/>
+                      <a:tailEnd type="none" w="med" len="med"/>
+                    </a:lnT>
+                    <a:lnB w="6350" cap="flat" cmpd="sng" algn="ctr">
+                      <a:solidFill>
+                        <a:srgbClr val="000000"/>
+                      </a:solidFill>
+                      <a:prstDash val="solid"/>
+                      <a:round/>
+                      <a:headEnd type="none" w="med" len="med"/>
+                      <a:tailEnd type="none" w="med" len="med"/>
+                    </a:lnB>
+                    <a:noFill/>
+                  </a:tcPr>
+                </a:tc>
+                <a:extLst>
+                  <a:ext uri="{0D108BD9-81ED-4DB2-BD59-A6C34878D82A}">
+                    <a16:rowId xmlns:a16="http://schemas.microsoft.com/office/drawing/2014/main" val="3032311886"/>
+                  </a:ext>
+                </a:extLst>
+              </a:tr>
+              <a:tr h="209550">
+                <a:tc>
+                  <a:txBody>
+                    <a:bodyPr/>
+                    <a:lstStyle/>
+                    <a:p>
+                      <a:pPr algn="l" fontAlgn="b">
+                        <a:buNone/>
+                      </a:pPr>
+                      <a:r>
+                        <a:rPr lang="en-ID" sz="1100" b="1" i="0" u="none" strike="noStrike">
+                          <a:solidFill>
+                            <a:srgbClr val="000000"/>
+                          </a:solidFill>
+                          <a:effectLst/>
+                          <a:latin typeface="Segoe UI" panose="020B0502040204020203" pitchFamily="34" charset="0"/>
+                        </a:rPr>
+                        <a:t>Majority</a:t>
+                      </a:r>
+                    </a:p>
+                  </a:txBody>
+                  <a:tcPr marL="9525" marR="9525" marT="9525" marB="0" anchor="b">
+                    <a:lnL w="6350" cap="flat" cmpd="sng" algn="ctr">
+                      <a:solidFill>
+                        <a:srgbClr val="000000"/>
+                      </a:solidFill>
+                      <a:prstDash val="solid"/>
+                      <a:round/>
+                      <a:headEnd type="none" w="med" len="med"/>
+                      <a:tailEnd type="none" w="med" len="med"/>
+                    </a:lnL>
+                    <a:lnR>
+                      <a:noFill/>
+                    </a:lnR>
+                    <a:lnT w="6350" cap="flat" cmpd="sng" algn="ctr">
+                      <a:solidFill>
+                        <a:srgbClr val="000000"/>
+                      </a:solidFill>
+                      <a:prstDash val="solid"/>
+                      <a:round/>
+                      <a:headEnd type="none" w="med" len="med"/>
+                      <a:tailEnd type="none" w="med" len="med"/>
+                    </a:lnT>
+                    <a:lnB w="6350" cap="flat" cmpd="sng" algn="ctr">
+                      <a:solidFill>
+                        <a:srgbClr val="000000"/>
+                      </a:solidFill>
+                      <a:prstDash val="solid"/>
+                      <a:round/>
+                      <a:headEnd type="none" w="med" len="med"/>
+                      <a:tailEnd type="none" w="med" len="med"/>
+                    </a:lnB>
+                    <a:noFill/>
+                  </a:tcPr>
+                </a:tc>
+                <a:tc>
+                  <a:txBody>
+                    <a:bodyPr/>
+                    <a:lstStyle/>
+                    <a:p>
+                      <a:pPr algn="ctr" fontAlgn="b">
+                        <a:buNone/>
+                      </a:pPr>
+                      <a:r>
+                        <a:rPr lang="en-ID" sz="1100" b="0" i="0" u="none" strike="noStrike">
+                          <a:solidFill>
+                            <a:srgbClr val="000000"/>
+                          </a:solidFill>
+                          <a:effectLst/>
+                          <a:latin typeface="Segoe UI" panose="020B0502040204020203" pitchFamily="34" charset="0"/>
+                        </a:rPr>
+                        <a:t>5</a:t>
+                      </a:r>
+                    </a:p>
+                  </a:txBody>
+                  <a:tcPr marL="9525" marR="9525" marT="9525" marB="0" anchor="b">
+                    <a:lnL>
+                      <a:noFill/>
+                    </a:lnL>
+                    <a:lnR>
+                      <a:noFill/>
+                    </a:lnR>
+                    <a:lnT w="6350" cap="flat" cmpd="sng" algn="ctr">
+                      <a:solidFill>
+                        <a:srgbClr val="000000"/>
+                      </a:solidFill>
+                      <a:prstDash val="solid"/>
+                      <a:round/>
+                      <a:headEnd type="none" w="med" len="med"/>
+                      <a:tailEnd type="none" w="med" len="med"/>
+                    </a:lnT>
+                    <a:lnB w="6350" cap="flat" cmpd="sng" algn="ctr">
+                      <a:solidFill>
+                        <a:srgbClr val="000000"/>
+                      </a:solidFill>
+                      <a:prstDash val="solid"/>
+                      <a:round/>
+                      <a:headEnd type="none" w="med" len="med"/>
+                      <a:tailEnd type="none" w="med" len="med"/>
+                    </a:lnB>
+                    <a:noFill/>
+                  </a:tcPr>
+                </a:tc>
+                <a:tc>
+                  <a:txBody>
+                    <a:bodyPr/>
+                    <a:lstStyle/>
+                    <a:p>
+                      <a:pPr algn="ctr" fontAlgn="b">
+                        <a:buNone/>
+                      </a:pPr>
+                      <a:r>
+                        <a:rPr lang="en-ID" sz="1100" b="0" i="0" u="none" strike="noStrike">
+                          <a:solidFill>
+                            <a:srgbClr val="000000"/>
+                          </a:solidFill>
+                          <a:effectLst/>
+                          <a:latin typeface="Segoe UI" panose="020B0502040204020203" pitchFamily="34" charset="0"/>
+                        </a:rPr>
+                        <a:t>5</a:t>
+                      </a:r>
+                    </a:p>
+                  </a:txBody>
+                  <a:tcPr marL="9525" marR="9525" marT="9525" marB="0" anchor="b">
+                    <a:lnL>
+                      <a:noFill/>
+                    </a:lnL>
+                    <a:lnR>
+                      <a:noFill/>
+                    </a:lnR>
+                    <a:lnT w="6350" cap="flat" cmpd="sng" algn="ctr">
+                      <a:solidFill>
+                        <a:srgbClr val="000000"/>
+                      </a:solidFill>
+                      <a:prstDash val="solid"/>
+                      <a:round/>
+                      <a:headEnd type="none" w="med" len="med"/>
+                      <a:tailEnd type="none" w="med" len="med"/>
+                    </a:lnT>
+                    <a:lnB w="6350" cap="flat" cmpd="sng" algn="ctr">
+                      <a:solidFill>
+                        <a:srgbClr val="000000"/>
+                      </a:solidFill>
+                      <a:prstDash val="solid"/>
+                      <a:round/>
+                      <a:headEnd type="none" w="med" len="med"/>
+                      <a:tailEnd type="none" w="med" len="med"/>
+                    </a:lnB>
+                    <a:noFill/>
+                  </a:tcPr>
+                </a:tc>
+                <a:tc>
+                  <a:txBody>
+                    <a:bodyPr/>
+                    <a:lstStyle/>
+                    <a:p>
+                      <a:pPr algn="ctr" fontAlgn="b">
+                        <a:buNone/>
+                      </a:pPr>
+                      <a:r>
+                        <a:rPr lang="en-ID" sz="1100" b="0" i="0" u="none" strike="noStrike">
+                          <a:solidFill>
+                            <a:srgbClr val="000000"/>
+                          </a:solidFill>
+                          <a:effectLst/>
+                          <a:latin typeface="Segoe UI" panose="020B0502040204020203" pitchFamily="34" charset="0"/>
+                        </a:rPr>
+                        <a:t>1</a:t>
+                      </a:r>
+                    </a:p>
+                  </a:txBody>
+                  <a:tcPr marL="9525" marR="9525" marT="9525" marB="0" anchor="b">
+                    <a:lnL>
+                      <a:noFill/>
+                    </a:lnL>
+                    <a:lnR w="6350" cap="flat" cmpd="sng" algn="ctr">
+                      <a:solidFill>
+                        <a:srgbClr val="000000"/>
+                      </a:solidFill>
+                      <a:prstDash val="solid"/>
+                      <a:round/>
+                      <a:headEnd type="none" w="med" len="med"/>
+                      <a:tailEnd type="none" w="med" len="med"/>
+                    </a:lnR>
+                    <a:lnT w="6350" cap="flat" cmpd="sng" algn="ctr">
+                      <a:solidFill>
+                        <a:srgbClr val="000000"/>
+                      </a:solidFill>
+                      <a:prstDash val="solid"/>
+                      <a:round/>
+                      <a:headEnd type="none" w="med" len="med"/>
+                      <a:tailEnd type="none" w="med" len="med"/>
+                    </a:lnT>
+                    <a:lnB w="6350" cap="flat" cmpd="sng" algn="ctr">
+                      <a:solidFill>
+                        <a:srgbClr val="000000"/>
+                      </a:solidFill>
+                      <a:prstDash val="solid"/>
+                      <a:round/>
+                      <a:headEnd type="none" w="med" len="med"/>
+                      <a:tailEnd type="none" w="med" len="med"/>
+                    </a:lnB>
+                    <a:noFill/>
+                  </a:tcPr>
+                </a:tc>
+                <a:extLst>
+                  <a:ext uri="{0D108BD9-81ED-4DB2-BD59-A6C34878D82A}">
+                    <a16:rowId xmlns:a16="http://schemas.microsoft.com/office/drawing/2014/main" val="2600696563"/>
+                  </a:ext>
+                </a:extLst>
+              </a:tr>
+              <a:tr h="209550">
+                <a:tc>
+                  <a:txBody>
+                    <a:bodyPr/>
+                    <a:lstStyle/>
+                    <a:p>
+                      <a:pPr algn="l" fontAlgn="b">
+                        <a:buNone/>
+                      </a:pPr>
+                      <a:r>
+                        <a:rPr lang="en-ID" sz="1100" b="1" i="0" u="none" strike="noStrike">
+                          <a:solidFill>
+                            <a:srgbClr val="000000"/>
+                          </a:solidFill>
+                          <a:effectLst/>
+                          <a:latin typeface="Segoe UI" panose="020B0502040204020203" pitchFamily="34" charset="0"/>
+                        </a:rPr>
+                        <a:t>Majority %</a:t>
+                      </a:r>
+                    </a:p>
+                  </a:txBody>
+                  <a:tcPr marL="9525" marR="9525" marT="9525" marB="0" anchor="b">
+                    <a:lnL w="6350" cap="flat" cmpd="sng" algn="ctr">
+                      <a:solidFill>
+                        <a:srgbClr val="000000"/>
+                      </a:solidFill>
+                      <a:prstDash val="solid"/>
+                      <a:round/>
+                      <a:headEnd type="none" w="med" len="med"/>
+                      <a:tailEnd type="none" w="med" len="med"/>
+                    </a:lnL>
+                    <a:lnR>
+                      <a:noFill/>
+                    </a:lnR>
+                    <a:lnT w="6350" cap="flat" cmpd="sng" algn="ctr">
+                      <a:solidFill>
+                        <a:srgbClr val="000000"/>
+                      </a:solidFill>
+                      <a:prstDash val="solid"/>
+                      <a:round/>
+                      <a:headEnd type="none" w="med" len="med"/>
+                      <a:tailEnd type="none" w="med" len="med"/>
+                    </a:lnT>
+                    <a:lnB w="6350" cap="flat" cmpd="sng" algn="ctr">
+                      <a:solidFill>
+                        <a:srgbClr val="000000"/>
+                      </a:solidFill>
+                      <a:prstDash val="solid"/>
+                      <a:round/>
+                      <a:headEnd type="none" w="med" len="med"/>
+                      <a:tailEnd type="none" w="med" len="med"/>
+                    </a:lnB>
+                    <a:noFill/>
+                  </a:tcPr>
+                </a:tc>
+                <a:tc>
+                  <a:txBody>
+                    <a:bodyPr/>
+                    <a:lstStyle/>
+                    <a:p>
+                      <a:pPr algn="ctr" fontAlgn="b">
+                        <a:buNone/>
+                      </a:pPr>
+                      <a:r>
+                        <a:rPr lang="en-ID" sz="1100" b="0" i="0" u="none" strike="noStrike">
+                          <a:solidFill>
+                            <a:srgbClr val="000000"/>
+                          </a:solidFill>
+                          <a:effectLst/>
+                          <a:latin typeface="Segoe UI" panose="020B0502040204020203" pitchFamily="34" charset="0"/>
+                        </a:rPr>
+                        <a:t>83.3</a:t>
+                      </a:r>
+                    </a:p>
+                  </a:txBody>
+                  <a:tcPr marL="9525" marR="9525" marT="9525" marB="0" anchor="b">
+                    <a:lnL>
+                      <a:noFill/>
+                    </a:lnL>
+                    <a:lnR>
+                      <a:noFill/>
+                    </a:lnR>
+                    <a:lnT w="6350" cap="flat" cmpd="sng" algn="ctr">
+                      <a:solidFill>
+                        <a:srgbClr val="000000"/>
+                      </a:solidFill>
+                      <a:prstDash val="solid"/>
+                      <a:round/>
+                      <a:headEnd type="none" w="med" len="med"/>
+                      <a:tailEnd type="none" w="med" len="med"/>
+                    </a:lnT>
+                    <a:lnB w="6350" cap="flat" cmpd="sng" algn="ctr">
+                      <a:solidFill>
+                        <a:srgbClr val="000000"/>
+                      </a:solidFill>
+                      <a:prstDash val="solid"/>
+                      <a:round/>
+                      <a:headEnd type="none" w="med" len="med"/>
+                      <a:tailEnd type="none" w="med" len="med"/>
+                    </a:lnB>
+                    <a:noFill/>
+                  </a:tcPr>
+                </a:tc>
+                <a:tc>
+                  <a:txBody>
+                    <a:bodyPr/>
+                    <a:lstStyle/>
+                    <a:p>
+                      <a:pPr algn="ctr" fontAlgn="b">
+                        <a:buNone/>
+                      </a:pPr>
+                      <a:r>
+                        <a:rPr lang="en-ID" sz="1100" b="0" i="0" u="none" strike="noStrike">
+                          <a:solidFill>
+                            <a:srgbClr val="000000"/>
+                          </a:solidFill>
+                          <a:effectLst/>
+                          <a:latin typeface="Segoe UI" panose="020B0502040204020203" pitchFamily="34" charset="0"/>
+                        </a:rPr>
+                        <a:t>87.5</a:t>
+                      </a:r>
+                    </a:p>
+                  </a:txBody>
+                  <a:tcPr marL="9525" marR="9525" marT="9525" marB="0" anchor="b">
+                    <a:lnL>
+                      <a:noFill/>
+                    </a:lnL>
+                    <a:lnR>
+                      <a:noFill/>
+                    </a:lnR>
+                    <a:lnT w="6350" cap="flat" cmpd="sng" algn="ctr">
+                      <a:solidFill>
+                        <a:srgbClr val="000000"/>
+                      </a:solidFill>
+                      <a:prstDash val="solid"/>
+                      <a:round/>
+                      <a:headEnd type="none" w="med" len="med"/>
+                      <a:tailEnd type="none" w="med" len="med"/>
+                    </a:lnT>
+                    <a:lnB w="6350" cap="flat" cmpd="sng" algn="ctr">
+                      <a:solidFill>
+                        <a:srgbClr val="000000"/>
+                      </a:solidFill>
+                      <a:prstDash val="solid"/>
+                      <a:round/>
+                      <a:headEnd type="none" w="med" len="med"/>
+                      <a:tailEnd type="none" w="med" len="med"/>
+                    </a:lnB>
+                    <a:noFill/>
+                  </a:tcPr>
+                </a:tc>
+                <a:tc>
+                  <a:txBody>
+                    <a:bodyPr/>
+                    <a:lstStyle/>
+                    <a:p>
+                      <a:pPr algn="ctr" fontAlgn="b">
+                        <a:buNone/>
+                      </a:pPr>
+                      <a:r>
+                        <a:rPr lang="en-ID" sz="1100" b="0" i="0" u="none" strike="noStrike">
+                          <a:solidFill>
+                            <a:srgbClr val="FF0000"/>
+                          </a:solidFill>
+                          <a:effectLst/>
+                          <a:latin typeface="Segoe UI" panose="020B0502040204020203" pitchFamily="34" charset="0"/>
+                        </a:rPr>
+                        <a:t>53.8</a:t>
+                      </a:r>
+                    </a:p>
+                  </a:txBody>
+                  <a:tcPr marL="9525" marR="9525" marT="9525" marB="0" anchor="b">
+                    <a:lnL>
+                      <a:noFill/>
+                    </a:lnL>
+                    <a:lnR w="6350" cap="flat" cmpd="sng" algn="ctr">
+                      <a:solidFill>
+                        <a:srgbClr val="000000"/>
+                      </a:solidFill>
+                      <a:prstDash val="solid"/>
+                      <a:round/>
+                      <a:headEnd type="none" w="med" len="med"/>
+                      <a:tailEnd type="none" w="med" len="med"/>
+                    </a:lnR>
+                    <a:lnT w="6350" cap="flat" cmpd="sng" algn="ctr">
+                      <a:solidFill>
+                        <a:srgbClr val="000000"/>
+                      </a:solidFill>
+                      <a:prstDash val="solid"/>
+                      <a:round/>
+                      <a:headEnd type="none" w="med" len="med"/>
+                      <a:tailEnd type="none" w="med" len="med"/>
+                    </a:lnT>
+                    <a:lnB w="6350" cap="flat" cmpd="sng" algn="ctr">
+                      <a:solidFill>
+                        <a:srgbClr val="000000"/>
+                      </a:solidFill>
+                      <a:prstDash val="solid"/>
+                      <a:round/>
+                      <a:headEnd type="none" w="med" len="med"/>
+                      <a:tailEnd type="none" w="med" len="med"/>
+                    </a:lnB>
+                    <a:noFill/>
+                  </a:tcPr>
+                </a:tc>
+                <a:extLst>
+                  <a:ext uri="{0D108BD9-81ED-4DB2-BD59-A6C34878D82A}">
+                    <a16:rowId xmlns:a16="http://schemas.microsoft.com/office/drawing/2014/main" val="1187505983"/>
+                  </a:ext>
+                </a:extLst>
+              </a:tr>
+              <a:tr h="209550">
+                <a:tc>
+                  <a:txBody>
+                    <a:bodyPr/>
+                    <a:lstStyle/>
+                    <a:p>
+                      <a:pPr algn="l" fontAlgn="b">
+                        <a:buNone/>
+                      </a:pPr>
+                      <a:r>
+                        <a:rPr lang="en-ID" sz="1100" b="1" i="0" u="none" strike="noStrike">
+                          <a:solidFill>
+                            <a:srgbClr val="000000"/>
+                          </a:solidFill>
+                          <a:effectLst/>
+                          <a:latin typeface="Segoe UI" panose="020B0502040204020203" pitchFamily="34" charset="0"/>
+                        </a:rPr>
+                        <a:t>Minority</a:t>
+                      </a:r>
+                    </a:p>
+                  </a:txBody>
+                  <a:tcPr marL="9525" marR="9525" marT="9525" marB="0" anchor="b">
+                    <a:lnL w="6350" cap="flat" cmpd="sng" algn="ctr">
+                      <a:solidFill>
+                        <a:srgbClr val="000000"/>
+                      </a:solidFill>
+                      <a:prstDash val="solid"/>
+                      <a:round/>
+                      <a:headEnd type="none" w="med" len="med"/>
+                      <a:tailEnd type="none" w="med" len="med"/>
+                    </a:lnL>
+                    <a:lnR>
+                      <a:noFill/>
+                    </a:lnR>
+                    <a:lnT w="6350" cap="flat" cmpd="sng" algn="ctr">
+                      <a:solidFill>
+                        <a:srgbClr val="000000"/>
+                      </a:solidFill>
+                      <a:prstDash val="solid"/>
+                      <a:round/>
+                      <a:headEnd type="none" w="med" len="med"/>
+                      <a:tailEnd type="none" w="med" len="med"/>
+                    </a:lnT>
+                    <a:lnB w="6350" cap="flat" cmpd="sng" algn="ctr">
+                      <a:solidFill>
+                        <a:srgbClr val="000000"/>
+                      </a:solidFill>
+                      <a:prstDash val="solid"/>
+                      <a:round/>
+                      <a:headEnd type="none" w="med" len="med"/>
+                      <a:tailEnd type="none" w="med" len="med"/>
+                    </a:lnB>
+                    <a:noFill/>
+                  </a:tcPr>
+                </a:tc>
+                <a:tc>
+                  <a:txBody>
+                    <a:bodyPr/>
+                    <a:lstStyle/>
+                    <a:p>
+                      <a:pPr algn="ctr" fontAlgn="b">
+                        <a:buNone/>
+                      </a:pPr>
+                      <a:r>
+                        <a:rPr lang="en-ID" sz="1100" b="0" i="0" u="none" strike="noStrike">
+                          <a:solidFill>
+                            <a:srgbClr val="000000"/>
+                          </a:solidFill>
+                          <a:effectLst/>
+                          <a:latin typeface="Segoe UI" panose="020B0502040204020203" pitchFamily="34" charset="0"/>
+                        </a:rPr>
+                        <a:t>1</a:t>
+                      </a:r>
+                    </a:p>
+                  </a:txBody>
+                  <a:tcPr marL="9525" marR="9525" marT="9525" marB="0" anchor="b">
+                    <a:lnL>
+                      <a:noFill/>
+                    </a:lnL>
+                    <a:lnR>
+                      <a:noFill/>
+                    </a:lnR>
+                    <a:lnT w="6350" cap="flat" cmpd="sng" algn="ctr">
+                      <a:solidFill>
+                        <a:srgbClr val="000000"/>
+                      </a:solidFill>
+                      <a:prstDash val="solid"/>
+                      <a:round/>
+                      <a:headEnd type="none" w="med" len="med"/>
+                      <a:tailEnd type="none" w="med" len="med"/>
+                    </a:lnT>
+                    <a:lnB w="6350" cap="flat" cmpd="sng" algn="ctr">
+                      <a:solidFill>
+                        <a:srgbClr val="000000"/>
+                      </a:solidFill>
+                      <a:prstDash val="solid"/>
+                      <a:round/>
+                      <a:headEnd type="none" w="med" len="med"/>
+                      <a:tailEnd type="none" w="med" len="med"/>
+                    </a:lnB>
+                    <a:noFill/>
+                  </a:tcPr>
+                </a:tc>
+                <a:tc>
+                  <a:txBody>
+                    <a:bodyPr/>
+                    <a:lstStyle/>
+                    <a:p>
+                      <a:pPr algn="ctr" fontAlgn="b">
+                        <a:buNone/>
+                      </a:pPr>
+                      <a:r>
+                        <a:rPr lang="en-ID" sz="1100" b="0" i="0" u="none" strike="noStrike">
+                          <a:solidFill>
+                            <a:srgbClr val="000000"/>
+                          </a:solidFill>
+                          <a:effectLst/>
+                          <a:latin typeface="Segoe UI" panose="020B0502040204020203" pitchFamily="34" charset="0"/>
+                        </a:rPr>
+                        <a:t>1</a:t>
+                      </a:r>
+                    </a:p>
+                  </a:txBody>
+                  <a:tcPr marL="9525" marR="9525" marT="9525" marB="0" anchor="b">
+                    <a:lnL>
+                      <a:noFill/>
+                    </a:lnL>
+                    <a:lnR>
+                      <a:noFill/>
+                    </a:lnR>
+                    <a:lnT w="6350" cap="flat" cmpd="sng" algn="ctr">
+                      <a:solidFill>
+                        <a:srgbClr val="000000"/>
+                      </a:solidFill>
+                      <a:prstDash val="solid"/>
+                      <a:round/>
+                      <a:headEnd type="none" w="med" len="med"/>
+                      <a:tailEnd type="none" w="med" len="med"/>
+                    </a:lnT>
+                    <a:lnB w="6350" cap="flat" cmpd="sng" algn="ctr">
+                      <a:solidFill>
+                        <a:srgbClr val="000000"/>
+                      </a:solidFill>
+                      <a:prstDash val="solid"/>
+                      <a:round/>
+                      <a:headEnd type="none" w="med" len="med"/>
+                      <a:tailEnd type="none" w="med" len="med"/>
+                    </a:lnB>
+                    <a:noFill/>
+                  </a:tcPr>
+                </a:tc>
+                <a:tc>
+                  <a:txBody>
+                    <a:bodyPr/>
+                    <a:lstStyle/>
+                    <a:p>
+                      <a:pPr algn="ctr" fontAlgn="b">
+                        <a:buNone/>
+                      </a:pPr>
+                      <a:r>
+                        <a:rPr lang="en-ID" sz="1100" b="0" i="0" u="none" strike="noStrike">
+                          <a:solidFill>
+                            <a:srgbClr val="000000"/>
+                          </a:solidFill>
+                          <a:effectLst/>
+                          <a:latin typeface="Segoe UI" panose="020B0502040204020203" pitchFamily="34" charset="0"/>
+                        </a:rPr>
+                        <a:t>3</a:t>
+                      </a:r>
+                    </a:p>
+                  </a:txBody>
+                  <a:tcPr marL="9525" marR="9525" marT="9525" marB="0" anchor="b">
+                    <a:lnL>
+                      <a:noFill/>
+                    </a:lnL>
+                    <a:lnR w="6350" cap="flat" cmpd="sng" algn="ctr">
+                      <a:solidFill>
+                        <a:srgbClr val="000000"/>
+                      </a:solidFill>
+                      <a:prstDash val="solid"/>
+                      <a:round/>
+                      <a:headEnd type="none" w="med" len="med"/>
+                      <a:tailEnd type="none" w="med" len="med"/>
+                    </a:lnR>
+                    <a:lnT w="6350" cap="flat" cmpd="sng" algn="ctr">
+                      <a:solidFill>
+                        <a:srgbClr val="000000"/>
+                      </a:solidFill>
+                      <a:prstDash val="solid"/>
+                      <a:round/>
+                      <a:headEnd type="none" w="med" len="med"/>
+                      <a:tailEnd type="none" w="med" len="med"/>
+                    </a:lnT>
+                    <a:lnB w="6350" cap="flat" cmpd="sng" algn="ctr">
+                      <a:solidFill>
+                        <a:srgbClr val="000000"/>
+                      </a:solidFill>
+                      <a:prstDash val="solid"/>
+                      <a:round/>
+                      <a:headEnd type="none" w="med" len="med"/>
+                      <a:tailEnd type="none" w="med" len="med"/>
+                    </a:lnB>
+                    <a:noFill/>
+                  </a:tcPr>
+                </a:tc>
+                <a:extLst>
+                  <a:ext uri="{0D108BD9-81ED-4DB2-BD59-A6C34878D82A}">
+                    <a16:rowId xmlns:a16="http://schemas.microsoft.com/office/drawing/2014/main" val="1536383330"/>
+                  </a:ext>
+                </a:extLst>
+              </a:tr>
+              <a:tr h="209550">
+                <a:tc>
+                  <a:txBody>
+                    <a:bodyPr/>
+                    <a:lstStyle/>
+                    <a:p>
+                      <a:pPr algn="l" fontAlgn="b">
+                        <a:buNone/>
+                      </a:pPr>
+                      <a:r>
+                        <a:rPr lang="en-ID" sz="1100" b="1" i="0" u="none" strike="noStrike">
+                          <a:solidFill>
+                            <a:srgbClr val="000000"/>
+                          </a:solidFill>
+                          <a:effectLst/>
+                          <a:latin typeface="Segoe UI" panose="020B0502040204020203" pitchFamily="34" charset="0"/>
+                        </a:rPr>
+                        <a:t>Minority %</a:t>
+                      </a:r>
+                    </a:p>
+                  </a:txBody>
+                  <a:tcPr marL="9525" marR="9525" marT="9525" marB="0" anchor="b">
+                    <a:lnL w="6350" cap="flat" cmpd="sng" algn="ctr">
+                      <a:solidFill>
+                        <a:srgbClr val="000000"/>
+                      </a:solidFill>
+                      <a:prstDash val="solid"/>
+                      <a:round/>
+                      <a:headEnd type="none" w="med" len="med"/>
+                      <a:tailEnd type="none" w="med" len="med"/>
+                    </a:lnL>
+                    <a:lnR>
+                      <a:noFill/>
+                    </a:lnR>
+                    <a:lnT w="6350" cap="flat" cmpd="sng" algn="ctr">
+                      <a:solidFill>
+                        <a:srgbClr val="000000"/>
+                      </a:solidFill>
+                      <a:prstDash val="solid"/>
+                      <a:round/>
+                      <a:headEnd type="none" w="med" len="med"/>
+                      <a:tailEnd type="none" w="med" len="med"/>
+                    </a:lnT>
+                    <a:lnB w="6350" cap="flat" cmpd="sng" algn="ctr">
+                      <a:solidFill>
+                        <a:srgbClr val="000000"/>
+                      </a:solidFill>
+                      <a:prstDash val="solid"/>
+                      <a:round/>
+                      <a:headEnd type="none" w="med" len="med"/>
+                      <a:tailEnd type="none" w="med" len="med"/>
+                    </a:lnB>
+                    <a:noFill/>
+                  </a:tcPr>
+                </a:tc>
+                <a:tc>
+                  <a:txBody>
+                    <a:bodyPr/>
+                    <a:lstStyle/>
+                    <a:p>
+                      <a:pPr algn="ctr" fontAlgn="b">
+                        <a:buNone/>
+                      </a:pPr>
+                      <a:r>
+                        <a:rPr lang="en-ID" sz="1100" b="0" i="0" u="none" strike="noStrike">
+                          <a:solidFill>
+                            <a:srgbClr val="000000"/>
+                          </a:solidFill>
+                          <a:effectLst/>
+                          <a:latin typeface="Segoe UI" panose="020B0502040204020203" pitchFamily="34" charset="0"/>
+                        </a:rPr>
+                        <a:t>16.67</a:t>
+                      </a:r>
+                    </a:p>
+                  </a:txBody>
+                  <a:tcPr marL="9525" marR="9525" marT="9525" marB="0" anchor="b">
+                    <a:lnL>
+                      <a:noFill/>
+                    </a:lnL>
+                    <a:lnR>
+                      <a:noFill/>
+                    </a:lnR>
+                    <a:lnT w="6350" cap="flat" cmpd="sng" algn="ctr">
+                      <a:solidFill>
+                        <a:srgbClr val="000000"/>
+                      </a:solidFill>
+                      <a:prstDash val="solid"/>
+                      <a:round/>
+                      <a:headEnd type="none" w="med" len="med"/>
+                      <a:tailEnd type="none" w="med" len="med"/>
+                    </a:lnT>
+                    <a:lnB w="6350" cap="flat" cmpd="sng" algn="ctr">
+                      <a:solidFill>
+                        <a:srgbClr val="000000"/>
+                      </a:solidFill>
+                      <a:prstDash val="solid"/>
+                      <a:round/>
+                      <a:headEnd type="none" w="med" len="med"/>
+                      <a:tailEnd type="none" w="med" len="med"/>
+                    </a:lnB>
+                    <a:noFill/>
+                  </a:tcPr>
+                </a:tc>
+                <a:tc>
+                  <a:txBody>
+                    <a:bodyPr/>
+                    <a:lstStyle/>
+                    <a:p>
+                      <a:pPr algn="ctr" fontAlgn="b">
+                        <a:buNone/>
+                      </a:pPr>
+                      <a:r>
+                        <a:rPr lang="en-ID" sz="1100" b="0" i="0" u="none" strike="noStrike">
+                          <a:solidFill>
+                            <a:srgbClr val="000000"/>
+                          </a:solidFill>
+                          <a:effectLst/>
+                          <a:latin typeface="Segoe UI" panose="020B0502040204020203" pitchFamily="34" charset="0"/>
+                        </a:rPr>
+                        <a:t>25</a:t>
+                      </a:r>
+                    </a:p>
+                  </a:txBody>
+                  <a:tcPr marL="9525" marR="9525" marT="9525" marB="0" anchor="b">
+                    <a:lnL>
+                      <a:noFill/>
+                    </a:lnL>
+                    <a:lnR>
+                      <a:noFill/>
+                    </a:lnR>
+                    <a:lnT w="6350" cap="flat" cmpd="sng" algn="ctr">
+                      <a:solidFill>
+                        <a:srgbClr val="000000"/>
+                      </a:solidFill>
+                      <a:prstDash val="solid"/>
+                      <a:round/>
+                      <a:headEnd type="none" w="med" len="med"/>
+                      <a:tailEnd type="none" w="med" len="med"/>
+                    </a:lnT>
+                    <a:lnB w="6350" cap="flat" cmpd="sng" algn="ctr">
+                      <a:solidFill>
+                        <a:srgbClr val="000000"/>
+                      </a:solidFill>
+                      <a:prstDash val="solid"/>
+                      <a:round/>
+                      <a:headEnd type="none" w="med" len="med"/>
+                      <a:tailEnd type="none" w="med" len="med"/>
+                    </a:lnB>
+                    <a:noFill/>
+                  </a:tcPr>
+                </a:tc>
+                <a:tc>
+                  <a:txBody>
+                    <a:bodyPr/>
+                    <a:lstStyle/>
+                    <a:p>
+                      <a:pPr algn="ctr" fontAlgn="b">
+                        <a:buNone/>
+                      </a:pPr>
+                      <a:r>
+                        <a:rPr lang="en-ID" sz="1100" b="0" i="0" u="none" strike="noStrike" dirty="0">
+                          <a:solidFill>
+                            <a:srgbClr val="000000"/>
+                          </a:solidFill>
+                          <a:effectLst/>
+                          <a:latin typeface="Segoe UI" panose="020B0502040204020203" pitchFamily="34" charset="0"/>
+                        </a:rPr>
+                        <a:t>7.7</a:t>
+                      </a:r>
+                    </a:p>
+                  </a:txBody>
+                  <a:tcPr marL="9525" marR="9525" marT="9525" marB="0" anchor="b">
+                    <a:lnL>
+                      <a:noFill/>
+                    </a:lnL>
+                    <a:lnR w="6350" cap="flat" cmpd="sng" algn="ctr">
+                      <a:solidFill>
+                        <a:srgbClr val="000000"/>
+                      </a:solidFill>
+                      <a:prstDash val="solid"/>
+                      <a:round/>
+                      <a:headEnd type="none" w="med" len="med"/>
+                      <a:tailEnd type="none" w="med" len="med"/>
+                    </a:lnR>
+                    <a:lnT w="6350" cap="flat" cmpd="sng" algn="ctr">
+                      <a:solidFill>
+                        <a:srgbClr val="000000"/>
+                      </a:solidFill>
+                      <a:prstDash val="solid"/>
+                      <a:round/>
+                      <a:headEnd type="none" w="med" len="med"/>
+                      <a:tailEnd type="none" w="med" len="med"/>
+                    </a:lnT>
+                    <a:lnB w="6350" cap="flat" cmpd="sng" algn="ctr">
+                      <a:solidFill>
+                        <a:srgbClr val="000000"/>
+                      </a:solidFill>
+                      <a:prstDash val="solid"/>
+                      <a:round/>
+                      <a:headEnd type="none" w="med" len="med"/>
+                      <a:tailEnd type="none" w="med" len="med"/>
+                    </a:lnB>
+                    <a:noFill/>
+                  </a:tcPr>
+                </a:tc>
+                <a:extLst>
+                  <a:ext uri="{0D108BD9-81ED-4DB2-BD59-A6C34878D82A}">
+                    <a16:rowId xmlns:a16="http://schemas.microsoft.com/office/drawing/2014/main" val="3909797044"/>
+                  </a:ext>
+                </a:extLst>
+              </a:tr>
+            </a:tbl>
+          </a:graphicData>
+        </a:graphic>
+      </p:graphicFrame>
+      <p:sp>
+        <p:nvSpPr>
+          <p:cNvPr id="16" name="TextBox 15">
+            <a:extLst>
+              <a:ext uri="{FF2B5EF4-FFF2-40B4-BE49-F238E27FC236}">
+                <a16:creationId xmlns:a16="http://schemas.microsoft.com/office/drawing/2014/main" id="{B7E01267-62AD-03A2-02F5-F00CA4B79DFC}"/>
+              </a:ext>
+            </a:extLst>
+          </p:cNvPr>
+          <p:cNvSpPr txBox="1"/>
+          <p:nvPr/>
+        </p:nvSpPr>
+        <p:spPr>
+          <a:xfrm>
+            <a:off x="6951179" y="4632029"/>
+            <a:ext cx="1160895" cy="261610"/>
+          </a:xfrm>
+          <a:prstGeom prst="rect">
+            <a:avLst/>
+          </a:prstGeom>
+          <a:noFill/>
+        </p:spPr>
+        <p:txBody>
+          <a:bodyPr wrap="none" rtlCol="0">
+            <a:spAutoFit/>
+          </a:bodyPr>
+          <a:lstStyle/>
+          <a:p>
+            <a:r>
+              <a:rPr lang="en-US" sz="1100" b="1" dirty="0">
+                <a:latin typeface="Segoe UI" panose="020B0502040204020203" pitchFamily="34" charset="0"/>
+                <a:cs typeface="Segoe UI" panose="020B0502040204020203" pitchFamily="34" charset="0"/>
+              </a:rPr>
+              <a:t>Statistic Result</a:t>
+            </a:r>
+          </a:p>
+        </p:txBody>
+      </p:sp>
+    </p:spTree>
+    <p:extLst>
+      <p:ext uri="{BB962C8B-B14F-4D97-AF65-F5344CB8AC3E}">
+        <p14:creationId xmlns:p14="http://schemas.microsoft.com/office/powerpoint/2010/main" val="634181141"/>
+      </p:ext>
+    </p:extLst>
+  </p:cSld>
+  <p:clrMapOvr>
+    <a:masterClrMapping/>
+  </p:clrMapOvr>
+</p:sld>
+</file>
+
 <file path=ppt/theme/theme1.xml><?xml version="1.0" encoding="utf-8"?>
 <a:theme xmlns:a="http://schemas.openxmlformats.org/drawingml/2006/main" name="Office Theme">
   <a:themeElements>
